--- a/outputs/produkte/mama-ceo/03-praesentationen/saeule-3/05-lektion-3-5.pptx
+++ b/outputs/produkte/mama-ceo/03-praesentationen/saeule-3/05-lektion-3-5.pptx
@@ -11,12 +11,8 @@
     <p:sldId id="259" r:id="rId11"/>
     <p:sldId id="260" r:id="rId12"/>
     <p:sldId id="261" r:id="rId13"/>
-    <p:sldId id="262" r:id="rId14"/>
-    <p:sldId id="263" r:id="rId15"/>
-    <p:sldId id="264" r:id="rId16"/>
-    <p:sldId id="265" r:id="rId17"/>
   </p:sldIdLst>
-  <p:sldSz cx="12191695" cy="6858000" type="screen4x3"/>
+  <p:sldSz cx="9144000" cy="5143500" type="screen4x3"/>
   <p:notesSz cx="6858000" cy="9144000"/>
   <p:defaultTextStyle>
     <a:defPPr>
@@ -536,76 +532,6 @@
 </p:notes>
 </file>
 
-<file path=ppt/notesSlides/notesSlide10.xml><?xml version="1.0" encoding="utf-8"?>
-<p:notes xmlns:a="http://schemas.openxmlformats.org/drawingml/2006/main" xmlns:p="http://schemas.openxmlformats.org/presentationml/2006/main" xmlns:r="http://schemas.openxmlformats.org/officeDocument/2006/relationships">
-  <p:cSld>
-    <p:spTree>
-      <p:nvGrpSpPr>
-        <p:cNvPr id="1" name=""/>
-        <p:cNvGrpSpPr/>
-        <p:nvPr/>
-      </p:nvGrpSpPr>
-      <p:grpSpPr>
-        <a:xfrm>
-          <a:off x="0" y="0"/>
-          <a:ext cx="0" cy="0"/>
-          <a:chOff x="0" y="0"/>
-          <a:chExt cx="0" cy="0"/>
-        </a:xfrm>
-      </p:grpSpPr>
-      <p:sp>
-        <p:nvSpPr>
-          <p:cNvPr id="2" name="Slide Image Placeholder 1"/>
-          <p:cNvSpPr>
-            <a:spLocks noGrp="1"/>
-          </p:cNvSpPr>
-          <p:nvPr>
-            <p:ph type="sldImg" idx="2"/>
-          </p:nvPr>
-        </p:nvSpPr>
-        <p:spPr/>
-      </p:sp>
-      <p:sp>
-        <p:nvSpPr>
-          <p:cNvPr id="3" name="Notes Placeholder 2"/>
-          <p:cNvSpPr>
-            <a:spLocks noGrp="1"/>
-          </p:cNvSpPr>
-          <p:nvPr>
-            <p:ph type="body" idx="3" sz="quarter"/>
-          </p:nvPr>
-        </p:nvSpPr>
-        <p:spPr/>
-        <p:txBody>
-          <a:bodyPr/>
-          <a:lstStyle/>
-          <a:p>
-            <a:r>
-              <a:t>Wenn du alle Schritte gemacht hast, steht dein Business-Brain. Hak im Arbeitsblatt jeden Schritt ab, und wenn du irgendwo hängst, notier dir die Frage und bring dein eingerichtetes Notion zum Live-Call zwei mit, da schauen wir gemeinsam drauf. Ich bin stolz auf dich.</a:t>
-            </a:r>
-          </a:p>
-        </p:txBody>
-      </p:sp>
-      <p:sp>
-        <p:nvSpPr>
-          <p:cNvPr id="4" name="Slide Number Placeholder 3"/>
-          <p:cNvSpPr>
-            <a:spLocks noGrp="1"/>
-          </p:cNvSpPr>
-          <p:nvPr>
-            <p:ph type="sldNum" idx="5" sz="quarter"/>
-          </p:nvPr>
-        </p:nvSpPr>
-        <p:spPr/>
-      </p:sp>
-    </p:spTree>
-  </p:cSld>
-  <p:clrMapOvr>
-    <a:masterClrMapping/>
-  </p:clrMapOvr>
-</p:notes>
-</file>
-
 <file path=ppt/notesSlides/notesSlide2.xml><?xml version="1.0" encoding="utf-8"?>
 <p:notes xmlns:a="http://schemas.openxmlformats.org/drawingml/2006/main" xmlns:p="http://schemas.openxmlformats.org/presentationml/2006/main" xmlns:r="http://schemas.openxmlformats.org/officeDocument/2006/relationships">
   <p:cSld>
@@ -721,7 +647,7 @@
           <a:lstStyle/>
           <a:p>
             <a:r>
-              <a:t>Erster Schritt: du öffnest mein Template und klickst oben rechts auf Duplicate. Damit landet das komplette Ding in deinem eigenen Notion, mit allen Unterseiten und Datenbanken. Ab jetzt arbeitest du in deiner eigenen Kopie.</a:t>
+              <a:t>Erster Schritt: du duplizierst mein Template mit einem Klick oben rechts, damit landet alles in deinem eigenen Notion. Dann füllst du die Jahres-Datenbank aus Arbeitsblatt 3.3, danach die Monats-Datenbank aus 3.4 und verknüpfst sie mit dem Jahr. Als Viertes legst du deine aktuelle Woche an mit Kalenderwoche, Fokus-Säule, Power-Zeiten und den aktiven Bereichen.</a:t>
             </a:r>
           </a:p>
         </p:txBody>
@@ -791,7 +717,7 @@
           <a:lstStyle/>
           <a:p>
             <a:r>
-              <a:t>Zweiter Schritt: du füllst die Jahres-Datenbank mit dem, was du in Arbeitsblatt 3.3 erarbeitet hast. Dein Monats-Trio, deine Ferien, deine Anlässe. Es muss nicht perfekt sein, grob reicht völlig, das wächst mit der Zeit.</a:t>
+              <a:t>Fünftens legst du den heutigen Tag als Übung an und verknüpfst ihn mit der Woche. Sechstens kommen deine ein bis drei Ziele rein, verknüpft mit Jahr, Monat und Woche, das ist dein roter Faden. Siebtens legst du deine vier Rollen und dein Hütchen-Inventar als Referenz ab, und zum Schluss stellst du deinen 90-Tage-Tracker scharf.</a:t>
             </a:r>
           </a:p>
         </p:txBody>
@@ -861,7 +787,7 @@
           <a:lstStyle/>
           <a:p>
             <a:r>
-              <a:t>Dritter Schritt: dein Monatsplan aus Arbeitsblatt 3.4 wandert in die Monats-Datenbank. Fokus, drei Ziele, aktive Bereiche. Und ganz wichtig: du verknüpfst den Monat mit dem passenden Jahres-Eintrag, damit die Stufen wirklich zusammenhängen.</a:t>
+              <a:t>Und jetzt kommt der Grund, warum wir das so sauber verknüpfen: weil alles zusammenhängt, kann dein Cockpit-Bot später morgens deinen Tagesplaner lesen und dir per Telegram sagen, was heute dran ist. Den Bot selbst baust du in Säule vier, aber das Fundament dafür legst du genau heute.</a:t>
             </a:r>
           </a:p>
         </p:txBody>
@@ -931,217 +857,7 @@
           <a:lstStyle/>
           <a:p>
             <a:r>
-              <a:t>Vierter Schritt: du legst deine aktuelle Woche an. Die Kalenderwoche, deine Fokus-Säule, deine Power-Zeiten und die Bereiche, die diese Woche dran sind. Auch hier wieder: verknüpf die Woche mit dem Monat.</a:t>
-            </a:r>
-          </a:p>
-        </p:txBody>
-      </p:sp>
-      <p:sp>
-        <p:nvSpPr>
-          <p:cNvPr id="4" name="Slide Number Placeholder 3"/>
-          <p:cNvSpPr>
-            <a:spLocks noGrp="1"/>
-          </p:cNvSpPr>
-          <p:nvPr>
-            <p:ph type="sldNum" idx="5" sz="quarter"/>
-          </p:nvPr>
-        </p:nvSpPr>
-        <p:spPr/>
-      </p:sp>
-    </p:spTree>
-  </p:cSld>
-  <p:clrMapOvr>
-    <a:masterClrMapping/>
-  </p:clrMapOvr>
-</p:notes>
-</file>
-
-<file path=ppt/notesSlides/notesSlide7.xml><?xml version="1.0" encoding="utf-8"?>
-<p:notes xmlns:a="http://schemas.openxmlformats.org/drawingml/2006/main" xmlns:p="http://schemas.openxmlformats.org/presentationml/2006/main" xmlns:r="http://schemas.openxmlformats.org/officeDocument/2006/relationships">
-  <p:cSld>
-    <p:spTree>
-      <p:nvGrpSpPr>
-        <p:cNvPr id="1" name=""/>
-        <p:cNvGrpSpPr/>
-        <p:nvPr/>
-      </p:nvGrpSpPr>
-      <p:grpSpPr>
-        <a:xfrm>
-          <a:off x="0" y="0"/>
-          <a:ext cx="0" cy="0"/>
-          <a:chOff x="0" y="0"/>
-          <a:chExt cx="0" cy="0"/>
-        </a:xfrm>
-      </p:grpSpPr>
-      <p:sp>
-        <p:nvSpPr>
-          <p:cNvPr id="2" name="Slide Image Placeholder 1"/>
-          <p:cNvSpPr>
-            <a:spLocks noGrp="1"/>
-          </p:cNvSpPr>
-          <p:nvPr>
-            <p:ph type="sldImg" idx="2"/>
-          </p:nvPr>
-        </p:nvSpPr>
-        <p:spPr/>
-      </p:sp>
-      <p:sp>
-        <p:nvSpPr>
-          <p:cNvPr id="3" name="Notes Placeholder 2"/>
-          <p:cNvSpPr>
-            <a:spLocks noGrp="1"/>
-          </p:cNvSpPr>
-          <p:nvPr>
-            <p:ph type="body" idx="3" sz="quarter"/>
-          </p:nvPr>
-        </p:nvSpPr>
-        <p:spPr/>
-        <p:txBody>
-          <a:bodyPr/>
-          <a:lstStyle/>
-          <a:p>
-            <a:r>
-              <a:t>Fünfter Schritt: du legst den heutigen Tag an, einfach als Übung. Setz dir einen Tagesfokus und zieh dir drei Hauptaufgaben aus deiner Aufgaben-Liste. Verknüpf den Tag mit der Woche, und schon greift die ganze Kette ineinander.</a:t>
-            </a:r>
-          </a:p>
-        </p:txBody>
-      </p:sp>
-      <p:sp>
-        <p:nvSpPr>
-          <p:cNvPr id="4" name="Slide Number Placeholder 3"/>
-          <p:cNvSpPr>
-            <a:spLocks noGrp="1"/>
-          </p:cNvSpPr>
-          <p:nvPr>
-            <p:ph type="sldNum" idx="5" sz="quarter"/>
-          </p:nvPr>
-        </p:nvSpPr>
-        <p:spPr/>
-      </p:sp>
-    </p:spTree>
-  </p:cSld>
-  <p:clrMapOvr>
-    <a:masterClrMapping/>
-  </p:clrMapOvr>
-</p:notes>
-</file>
-
-<file path=ppt/notesSlides/notesSlide8.xml><?xml version="1.0" encoding="utf-8"?>
-<p:notes xmlns:a="http://schemas.openxmlformats.org/drawingml/2006/main" xmlns:p="http://schemas.openxmlformats.org/presentationml/2006/main" xmlns:r="http://schemas.openxmlformats.org/officeDocument/2006/relationships">
-  <p:cSld>
-    <p:spTree>
-      <p:nvGrpSpPr>
-        <p:cNvPr id="1" name=""/>
-        <p:cNvGrpSpPr/>
-        <p:nvPr/>
-      </p:nvGrpSpPr>
-      <p:grpSpPr>
-        <a:xfrm>
-          <a:off x="0" y="0"/>
-          <a:ext cx="0" cy="0"/>
-          <a:chOff x="0" y="0"/>
-          <a:chExt cx="0" cy="0"/>
-        </a:xfrm>
-      </p:grpSpPr>
-      <p:sp>
-        <p:nvSpPr>
-          <p:cNvPr id="2" name="Slide Image Placeholder 1"/>
-          <p:cNvSpPr>
-            <a:spLocks noGrp="1"/>
-          </p:cNvSpPr>
-          <p:nvPr>
-            <p:ph type="sldImg" idx="2"/>
-          </p:nvPr>
-        </p:nvSpPr>
-        <p:spPr/>
-      </p:sp>
-      <p:sp>
-        <p:nvSpPr>
-          <p:cNvPr id="3" name="Notes Placeholder 2"/>
-          <p:cNvSpPr>
-            <a:spLocks noGrp="1"/>
-          </p:cNvSpPr>
-          <p:nvPr>
-            <p:ph type="body" idx="3" sz="quarter"/>
-          </p:nvPr>
-        </p:nvSpPr>
-        <p:spPr/>
-        <p:txBody>
-          <a:bodyPr/>
-          <a:lstStyle/>
-          <a:p>
-            <a:r>
-              <a:t>Sechster Schritt: deine ein bis drei Ziele kommen rein und werden mit Jahr, Monat und Woche verknüpft, das ist dein roter Faden. Dann legst du deine vier Rollen und dein Hütchen-Inventar aus Säule eins und zwei als Referenz ab, und zum Schluss stellst du deinen 90-Tage-Tracker scharf.</a:t>
-            </a:r>
-          </a:p>
-        </p:txBody>
-      </p:sp>
-      <p:sp>
-        <p:nvSpPr>
-          <p:cNvPr id="4" name="Slide Number Placeholder 3"/>
-          <p:cNvSpPr>
-            <a:spLocks noGrp="1"/>
-          </p:cNvSpPr>
-          <p:nvPr>
-            <p:ph type="sldNum" idx="5" sz="quarter"/>
-          </p:nvPr>
-        </p:nvSpPr>
-        <p:spPr/>
-      </p:sp>
-    </p:spTree>
-  </p:cSld>
-  <p:clrMapOvr>
-    <a:masterClrMapping/>
-  </p:clrMapOvr>
-</p:notes>
-</file>
-
-<file path=ppt/notesSlides/notesSlide9.xml><?xml version="1.0" encoding="utf-8"?>
-<p:notes xmlns:a="http://schemas.openxmlformats.org/drawingml/2006/main" xmlns:p="http://schemas.openxmlformats.org/presentationml/2006/main" xmlns:r="http://schemas.openxmlformats.org/officeDocument/2006/relationships">
-  <p:cSld>
-    <p:spTree>
-      <p:nvGrpSpPr>
-        <p:cNvPr id="1" name=""/>
-        <p:cNvGrpSpPr/>
-        <p:nvPr/>
-      </p:nvGrpSpPr>
-      <p:grpSpPr>
-        <a:xfrm>
-          <a:off x="0" y="0"/>
-          <a:ext cx="0" cy="0"/>
-          <a:chOff x="0" y="0"/>
-          <a:chExt cx="0" cy="0"/>
-        </a:xfrm>
-      </p:grpSpPr>
-      <p:sp>
-        <p:nvSpPr>
-          <p:cNvPr id="2" name="Slide Image Placeholder 1"/>
-          <p:cNvSpPr>
-            <a:spLocks noGrp="1"/>
-          </p:cNvSpPr>
-          <p:nvPr>
-            <p:ph type="sldImg" idx="2"/>
-          </p:nvPr>
-        </p:nvSpPr>
-        <p:spPr/>
-      </p:sp>
-      <p:sp>
-        <p:nvSpPr>
-          <p:cNvPr id="3" name="Notes Placeholder 2"/>
-          <p:cNvSpPr>
-            <a:spLocks noGrp="1"/>
-          </p:cNvSpPr>
-          <p:nvPr>
-            <p:ph type="body" idx="3" sz="quarter"/>
-          </p:nvPr>
-        </p:nvSpPr>
-        <p:spPr/>
-        <p:txBody>
-          <a:bodyPr/>
-          <a:lstStyle/>
-          <a:p>
-            <a:r>
-              <a:t>Und jetzt kommt der Grund, warum wir das so sauber verknüpfen: weil alles zusammenhängt, kann dein Cockpit-Bot später morgens deinen Tagesplaner lesen und dir per Telegram sagen, was heute dran ist. Den Bot selbst baust du in Säule vier, aber das Fundament dafür legst du genau heute.</a:t>
+              <a:t>Wenn du alle Schritte gemacht hast, steht dein Business-Brain. Hak im Arbeitsblatt jeden Schritt ab, und wenn du irgendwo hängst, notier dir die Frage und bring dein eingerichtetes Notion zum Live-Call zwei mit, da schauen wir gemeinsam drauf. Ich bin stolz auf dich.</a:t>
             </a:r>
           </a:p>
         </p:txBody>
@@ -4143,7 +3859,7 @@
     <p:bg>
       <p:bgPr>
         <a:solidFill>
-          <a:srgbClr val="1F6F6B"/>
+          <a:srgbClr val="F1ECDD"/>
         </a:solidFill>
         <a:effectLst/>
       </p:bgPr>
@@ -4157,14 +3873,58 @@
       <p:grpSpPr/>
       <p:sp>
         <p:nvSpPr>
-          <p:cNvPr id="2" name="TextBox 1"/>
+          <p:cNvPr id="2" name="Oval 1"/>
+          <p:cNvSpPr/>
+          <p:nvPr/>
+        </p:nvSpPr>
+        <p:spPr>
+          <a:xfrm>
+            <a:off x="6858000" y="3840480"/>
+            <a:ext cx="3200400" cy="3200400"/>
+          </a:xfrm>
+          <a:prstGeom prst="ellipse">
+            <a:avLst/>
+          </a:prstGeom>
+          <a:solidFill>
+            <a:srgbClr val="DC822E"/>
+          </a:solidFill>
+          <a:ln>
+            <a:noFill/>
+          </a:ln>
+          <a:effectLst/>
+        </p:spPr>
+        <p:style>
+          <a:lnRef idx="1">
+            <a:schemeClr val="accent1"/>
+          </a:lnRef>
+          <a:fillRef idx="3">
+            <a:schemeClr val="accent1"/>
+          </a:fillRef>
+          <a:effectRef idx="2">
+            <a:schemeClr val="accent1"/>
+          </a:effectRef>
+          <a:fontRef idx="minor">
+            <a:schemeClr val="lt1"/>
+          </a:fontRef>
+        </p:style>
+        <p:txBody>
+          <a:bodyPr rtlCol="0" anchor="ctr"/>
+          <a:lstStyle/>
+          <a:p>
+            <a:pPr algn="ctr"/>
+          </a:p>
+        </p:txBody>
+      </p:sp>
+      <p:sp>
+        <p:nvSpPr>
+          <p:cNvPr id="3" name="TextBox 2"/>
           <p:cNvSpPr txBox="1"/>
           <p:nvPr/>
         </p:nvSpPr>
         <p:spPr>
           <a:xfrm>
-            <a:off x="914400" y="1920240"/>
-            <a:ext cx="10332720" cy="914400"/>
+            <a:off x="548640" y="548640"/>
+            <a:ext cx="8046720" cy="365760"/>
           </a:xfrm>
           <a:prstGeom prst="rect">
             <a:avLst/>
@@ -4177,36 +3937,72 @@
           </a:bodyPr>
           <a:lstStyle/>
           <a:p>
-            <a:pPr algn="l">
-              <a:spcBef>
-                <a:spcPts val="0"/>
-              </a:spcBef>
-              <a:spcAft>
-                <a:spcPts val="1400"/>
-              </a:spcAft>
-            </a:pPr>
-            <a:r>
-              <a:rPr sz="8000" b="1" i="0">
-                <a:solidFill>
-                  <a:srgbClr val="F1ECDD"/>
-                </a:solidFill>
-                <a:latin typeface="Georgia"/>
+            <a:r>
+              <a:rPr sz="1100" b="1" i="0">
+                <a:solidFill>
+                  <a:srgbClr val="DC822E"/>
+                </a:solidFill>
+                <a:latin typeface="Calibri"/>
               </a:rPr>
-              <a:t>3.5</a:t>
-            </a:r>
-          </a:p>
-        </p:txBody>
-      </p:sp>
-      <p:sp>
-        <p:nvSpPr>
-          <p:cNvPr id="3" name="TextBox 2"/>
+              <a:t>SÄULE 3 — DU BAUST DIE STRUKTUR · MASTERY</a:t>
+            </a:r>
+          </a:p>
+        </p:txBody>
+      </p:sp>
+      <p:sp>
+        <p:nvSpPr>
+          <p:cNvPr id="4" name="Rectangle 3"/>
+          <p:cNvSpPr/>
+          <p:nvPr/>
+        </p:nvSpPr>
+        <p:spPr>
+          <a:xfrm>
+            <a:off x="548640" y="960120"/>
+            <a:ext cx="548640" cy="45720"/>
+          </a:xfrm>
+          <a:prstGeom prst="rect">
+            <a:avLst/>
+          </a:prstGeom>
+          <a:solidFill>
+            <a:srgbClr val="DC822E"/>
+          </a:solidFill>
+          <a:ln>
+            <a:noFill/>
+          </a:ln>
+          <a:effectLst/>
+        </p:spPr>
+        <p:style>
+          <a:lnRef idx="1">
+            <a:schemeClr val="accent1"/>
+          </a:lnRef>
+          <a:fillRef idx="3">
+            <a:schemeClr val="accent1"/>
+          </a:fillRef>
+          <a:effectRef idx="2">
+            <a:schemeClr val="accent1"/>
+          </a:effectRef>
+          <a:fontRef idx="minor">
+            <a:schemeClr val="lt1"/>
+          </a:fontRef>
+        </p:style>
+        <p:txBody>
+          <a:bodyPr rtlCol="0" anchor="ctr"/>
+          <a:lstStyle/>
+          <a:p>
+            <a:pPr algn="ctr"/>
+          </a:p>
+        </p:txBody>
+      </p:sp>
+      <p:sp>
+        <p:nvSpPr>
+          <p:cNvPr id="5" name="TextBox 4"/>
           <p:cNvSpPr txBox="1"/>
           <p:nvPr/>
         </p:nvSpPr>
         <p:spPr>
           <a:xfrm>
-            <a:off x="914400" y="2971800"/>
-            <a:ext cx="10332720" cy="1828800"/>
+            <a:off x="548640" y="1234440"/>
+            <a:ext cx="7863840" cy="1463040"/>
           </a:xfrm>
           <a:prstGeom prst="rect">
             <a:avLst/>
@@ -4219,36 +4015,28 @@
           </a:bodyPr>
           <a:lstStyle/>
           <a:p>
-            <a:pPr algn="l">
-              <a:spcBef>
-                <a:spcPts val="0"/>
-              </a:spcBef>
-              <a:spcAft>
-                <a:spcPts val="1400"/>
-              </a:spcAft>
-            </a:pPr>
-            <a:r>
-              <a:rPr sz="4200" b="1" i="0">
-                <a:solidFill>
-                  <a:srgbClr val="FFFFFF"/>
+            <a:r>
+              <a:rPr sz="4400" b="1" i="0">
+                <a:solidFill>
+                  <a:srgbClr val="1A3A4A"/>
                 </a:solidFill>
                 <a:latin typeface="Georgia"/>
               </a:rPr>
-              <a:t>MASTERY · Dein Notion-Template einrichten</a:t>
-            </a:r>
-          </a:p>
-        </p:txBody>
-      </p:sp>
-      <p:sp>
-        <p:nvSpPr>
-          <p:cNvPr id="4" name="TextBox 3"/>
+              <a:t>Dein Notion-Template einrichten</a:t>
+            </a:r>
+          </a:p>
+        </p:txBody>
+      </p:sp>
+      <p:sp>
+        <p:nvSpPr>
+          <p:cNvPr id="6" name="TextBox 5"/>
           <p:cNvSpPr txBox="1"/>
           <p:nvPr/>
         </p:nvSpPr>
         <p:spPr>
           <a:xfrm>
-            <a:off x="914400" y="4572000"/>
-            <a:ext cx="10332720" cy="914400"/>
+            <a:off x="548640" y="2880360"/>
+            <a:ext cx="7680960" cy="1280160"/>
           </a:xfrm>
           <a:prstGeom prst="rect">
             <a:avLst/>
@@ -4261,62 +4049,28 @@
           </a:bodyPr>
           <a:lstStyle/>
           <a:p>
-            <a:pPr algn="l">
-              <a:spcBef>
-                <a:spcPts val="0"/>
-              </a:spcBef>
-              <a:spcAft>
-                <a:spcPts val="1400"/>
-              </a:spcAft>
-            </a:pPr>
-            <a:r>
-              <a:rPr sz="2400" b="0" i="1">
-                <a:solidFill>
-                  <a:srgbClr val="F1ECDD"/>
-                </a:solidFill>
-                <a:latin typeface="Calibri"/>
+            <a:r>
+              <a:rPr sz="1800" b="0" i="0">
+                <a:solidFill>
+                  <a:srgbClr val="2C3E50"/>
+                </a:solidFill>
+                <a:latin typeface="Georgia"/>
               </a:rPr>
               <a:t>Jetzt bauen wir dein Business-Brain</a:t>
             </a:r>
           </a:p>
         </p:txBody>
       </p:sp>
-    </p:spTree>
-  </p:cSld>
-  <p:clrMapOvr>
-    <a:masterClrMapping/>
-  </p:clrMapOvr>
-</p:sld>
-</file>
-
-<file path=ppt/slides/slide10.xml><?xml version="1.0" encoding="utf-8"?>
-<p:sld xmlns:a="http://schemas.openxmlformats.org/drawingml/2006/main" xmlns:p="http://schemas.openxmlformats.org/presentationml/2006/main" xmlns:r="http://schemas.openxmlformats.org/officeDocument/2006/relationships">
-  <p:cSld>
-    <p:bg>
-      <p:bgPr>
-        <a:solidFill>
-          <a:srgbClr val="1F6F6B"/>
-        </a:solidFill>
-        <a:effectLst/>
-      </p:bgPr>
-    </p:bg>
-    <p:spTree>
-      <p:nvGrpSpPr>
-        <p:cNvPr id="1" name=""/>
-        <p:cNvGrpSpPr/>
-        <p:nvPr/>
-      </p:nvGrpSpPr>
-      <p:grpSpPr/>
-      <p:sp>
-        <p:nvSpPr>
-          <p:cNvPr id="2" name="TextBox 1"/>
+      <p:sp>
+        <p:nvSpPr>
+          <p:cNvPr id="7" name="TextBox 6"/>
           <p:cNvSpPr txBox="1"/>
           <p:nvPr/>
         </p:nvSpPr>
         <p:spPr>
           <a:xfrm>
-            <a:off x="1005840" y="2194560"/>
-            <a:ext cx="10149840" cy="2743200"/>
+            <a:off x="548640" y="4572000"/>
+            <a:ext cx="3657600" cy="365760"/>
           </a:xfrm>
           <a:prstGeom prst="rect">
             <a:avLst/>
@@ -4324,65 +4078,54 @@
           <a:noFill/>
         </p:spPr>
         <p:txBody>
-          <a:bodyPr wrap="square" anchor="ctr" lIns="0" rIns="0" tIns="0" bIns="0">
+          <a:bodyPr wrap="square" anchor="t" lIns="0" rIns="0" tIns="0" bIns="0">
             <a:spAutoFit/>
           </a:bodyPr>
           <a:lstStyle/>
           <a:p>
-            <a:pPr algn="l">
-              <a:spcBef>
-                <a:spcPts val="0"/>
-              </a:spcBef>
-              <a:spcAft>
-                <a:spcPts val="1800"/>
-              </a:spcAft>
-            </a:pPr>
-            <a:r>
-              <a:rPr sz="3200" b="1" i="0">
-                <a:solidFill>
-                  <a:srgbClr val="FFFFFF"/>
-                </a:solidFill>
-                <a:latin typeface="Georgia"/>
-              </a:rPr>
-              <a:t>Dein Business-Brain steht. 🎯</a:t>
-            </a:r>
-          </a:p>
-          <a:p>
-            <a:pPr algn="l">
-              <a:spcBef>
-                <a:spcPts val="0"/>
-              </a:spcBef>
-              <a:spcAft>
-                <a:spcPts val="1800"/>
-              </a:spcAft>
-            </a:pPr>
-            <a:r>
-              <a:rPr sz="2200" b="0" i="0">
-                <a:solidFill>
-                  <a:srgbClr val="F1ECDD"/>
+            <a:r>
+              <a:rPr sz="1200" b="1" i="0">
+                <a:solidFill>
+                  <a:srgbClr val="12828C"/>
                 </a:solidFill>
                 <a:latin typeface="Calibri"/>
               </a:rPr>
-              <a:t>📋 Im Arbeitsblatt: die Einricht-Checkliste, Häkchen für Häkchen</a:t>
-            </a:r>
-          </a:p>
-          <a:p>
-            <a:pPr algn="l">
-              <a:spcBef>
-                <a:spcPts val="0"/>
-              </a:spcBef>
-              <a:spcAft>
-                <a:spcPts val="1800"/>
-              </a:spcAft>
-            </a:pPr>
-            <a:r>
-              <a:rPr sz="2200" b="0" i="0">
-                <a:solidFill>
-                  <a:srgbClr val="F1ECDD"/>
+              <a:t>Patricia Ulmann</a:t>
+            </a:r>
+          </a:p>
+        </p:txBody>
+      </p:sp>
+      <p:sp>
+        <p:nvSpPr>
+          <p:cNvPr id="8" name="TextBox 7"/>
+          <p:cNvSpPr txBox="1"/>
+          <p:nvPr/>
+        </p:nvSpPr>
+        <p:spPr>
+          <a:xfrm>
+            <a:off x="4937760" y="4572000"/>
+            <a:ext cx="3657600" cy="365760"/>
+          </a:xfrm>
+          <a:prstGeom prst="rect">
+            <a:avLst/>
+          </a:prstGeom>
+          <a:noFill/>
+        </p:spPr>
+        <p:txBody>
+          <a:bodyPr wrap="square" anchor="t" lIns="0" rIns="0" tIns="0" bIns="0">
+            <a:spAutoFit/>
+          </a:bodyPr>
+          <a:lstStyle/>
+          <a:p>
+            <a:pPr algn="r"/>
+            <a:r>
+              <a:rPr sz="1100" b="0" i="0">
+                <a:solidFill>
+                  <a:srgbClr val="7A8A95"/>
                 </a:solidFill>
                 <a:latin typeface="Calibri"/>
               </a:rPr>
-              <a:t>Bring dein Notion zum Live-Call 2 — der Notion-Brain-Sprechstunde</a:t>
+              <a:t>mumlifebalance.ch</a:t>
             </a:r>
           </a:p>
         </p:txBody>
@@ -4415,58 +4158,14 @@
       <p:grpSpPr/>
       <p:sp>
         <p:nvSpPr>
-          <p:cNvPr id="2" name="Rectangle 1"/>
-          <p:cNvSpPr/>
-          <p:nvPr/>
-        </p:nvSpPr>
-        <p:spPr>
-          <a:xfrm>
-            <a:off x="548640" y="502920"/>
-            <a:ext cx="201168" cy="201168"/>
-          </a:xfrm>
-          <a:prstGeom prst="rect">
-            <a:avLst/>
-          </a:prstGeom>
-          <a:solidFill>
-            <a:srgbClr val="1F6F6B"/>
-          </a:solidFill>
-          <a:ln>
-            <a:noFill/>
-          </a:ln>
-          <a:effectLst/>
-        </p:spPr>
-        <p:style>
-          <a:lnRef idx="1">
-            <a:schemeClr val="accent1"/>
-          </a:lnRef>
-          <a:fillRef idx="3">
-            <a:schemeClr val="accent1"/>
-          </a:fillRef>
-          <a:effectRef idx="2">
-            <a:schemeClr val="accent1"/>
-          </a:effectRef>
-          <a:fontRef idx="minor">
-            <a:schemeClr val="lt1"/>
-          </a:fontRef>
-        </p:style>
-        <p:txBody>
-          <a:bodyPr rtlCol="0" anchor="ctr"/>
-          <a:lstStyle/>
-          <a:p>
-            <a:pPr algn="ctr"/>
-          </a:p>
-        </p:txBody>
-      </p:sp>
-      <p:sp>
-        <p:nvSpPr>
-          <p:cNvPr id="3" name="TextBox 2"/>
+          <p:cNvPr id="2" name="TextBox 1"/>
           <p:cNvSpPr txBox="1"/>
           <p:nvPr/>
         </p:nvSpPr>
         <p:spPr>
           <a:xfrm>
-            <a:off x="868680" y="457200"/>
-            <a:ext cx="10424160" cy="1005840"/>
+            <a:off x="548640" y="457200"/>
+            <a:ext cx="8046720" cy="914400"/>
           </a:xfrm>
           <a:prstGeom prst="rect">
             <a:avLst/>
@@ -4479,22 +4178,94 @@
           </a:bodyPr>
           <a:lstStyle/>
           <a:p>
-            <a:pPr algn="l">
+            <a:r>
+              <a:rPr sz="3000" b="1" i="0">
+                <a:solidFill>
+                  <a:srgbClr val="1A3A4A"/>
+                </a:solidFill>
+                <a:latin typeface="Georgia"/>
+              </a:rPr>
+              <a:t>Du baust nichts von null</a:t>
+            </a:r>
+          </a:p>
+        </p:txBody>
+      </p:sp>
+      <p:sp>
+        <p:nvSpPr>
+          <p:cNvPr id="3" name="TextBox 2"/>
+          <p:cNvSpPr txBox="1"/>
+          <p:nvPr/>
+        </p:nvSpPr>
+        <p:spPr>
+          <a:xfrm>
+            <a:off x="548640" y="1417320"/>
+            <a:ext cx="8046720" cy="3154680"/>
+          </a:xfrm>
+          <a:prstGeom prst="rect">
+            <a:avLst/>
+          </a:prstGeom>
+          <a:noFill/>
+        </p:spPr>
+        <p:txBody>
+          <a:bodyPr wrap="square" anchor="t" lIns="0" rIns="0" tIns="0" bIns="0">
+            <a:spAutoFit/>
+          </a:bodyPr>
+          <a:lstStyle/>
+          <a:p>
+            <a:pPr>
               <a:spcBef>
                 <a:spcPts val="0"/>
               </a:spcBef>
               <a:spcAft>
-                <a:spcPts val="1400"/>
+                <a:spcPts val="1000"/>
               </a:spcAft>
             </a:pPr>
             <a:r>
-              <a:rPr sz="3200" b="1" i="0">
-                <a:solidFill>
-                  <a:srgbClr val="1F6F6B"/>
+              <a:rPr sz="2100" b="1" i="0">
+                <a:solidFill>
+                  <a:srgbClr val="1A3A4A"/>
                 </a:solidFill>
                 <a:latin typeface="Georgia"/>
               </a:rPr>
-              <a:t>Du baust nichts von null</a:t>
+              <a:t>Du duplizierst mein fertiges Master-Template.</a:t>
+            </a:r>
+          </a:p>
+          <a:p>
+            <a:pPr>
+              <a:spcBef>
+                <a:spcPts val="0"/>
+              </a:spcBef>
+              <a:spcAft>
+                <a:spcPts val="900"/>
+              </a:spcAft>
+            </a:pPr>
+            <a:r>
+              <a:rPr sz="1600" b="0" i="0">
+                <a:solidFill>
+                  <a:srgbClr val="2C3E50"/>
+                </a:solidFill>
+                <a:latin typeface="Calibri"/>
+              </a:rPr>
+              <a:t>Dann füllst du es mit deinen Arbeitsblättern aus Säule 1, 2 und 3.</a:t>
+            </a:r>
+          </a:p>
+          <a:p>
+            <a:pPr>
+              <a:spcBef>
+                <a:spcPts val="0"/>
+              </a:spcBef>
+              <a:spcAft>
+                <a:spcPts val="800"/>
+              </a:spcAft>
+            </a:pPr>
+            <a:r>
+              <a:rPr sz="1400" b="0" i="1">
+                <a:solidFill>
+                  <a:srgbClr val="7A8A95"/>
+                </a:solidFill>
+                <a:latin typeface="Calibri"/>
+              </a:rPr>
+              <a:t>Plan dir 30 Minuten ungestört ein — und mach mit, während du schaust.</a:t>
             </a:r>
           </a:p>
         </p:txBody>
@@ -4507,8 +4278,8 @@
         </p:nvSpPr>
         <p:spPr>
           <a:xfrm>
-            <a:off x="868680" y="1783080"/>
-            <a:ext cx="10424160" cy="4572000"/>
+            <a:off x="457200" y="4754880"/>
+            <a:ext cx="5486400" cy="274320"/>
           </a:xfrm>
           <a:prstGeom prst="rect">
             <a:avLst/>
@@ -4521,60 +4292,49 @@
           </a:bodyPr>
           <a:lstStyle/>
           <a:p>
-            <a:pPr algn="l">
-              <a:spcBef>
-                <a:spcPts val="0"/>
-              </a:spcBef>
-              <a:spcAft>
-                <a:spcPts val="1400"/>
-              </a:spcAft>
-            </a:pPr>
-            <a:r>
-              <a:rPr sz="2600" b="1" i="0">
-                <a:solidFill>
-                  <a:srgbClr val="2A2A2A"/>
-                </a:solidFill>
-                <a:latin typeface="Georgia"/>
-              </a:rPr>
-              <a:t>Du duplizierst mein fertiges Master-Template.</a:t>
-            </a:r>
-          </a:p>
-          <a:p>
-            <a:pPr algn="l">
-              <a:spcBef>
-                <a:spcPts val="0"/>
-              </a:spcBef>
-              <a:spcAft>
-                <a:spcPts val="1400"/>
-              </a:spcAft>
-            </a:pPr>
-            <a:r>
-              <a:rPr sz="2100" b="0" i="0">
-                <a:solidFill>
-                  <a:srgbClr val="2A2A2A"/>
+            <a:r>
+              <a:rPr sz="900" b="0" i="0">
+                <a:solidFill>
+                  <a:srgbClr val="7A8A95"/>
                 </a:solidFill>
                 <a:latin typeface="Calibri"/>
               </a:rPr>
-              <a:t>Dann füllst du es mit deinen Arbeitsblättern aus Säule 1, 2 und 3.</a:t>
-            </a:r>
-          </a:p>
-          <a:p>
-            <a:pPr algn="l">
-              <a:spcBef>
-                <a:spcPts val="0"/>
-              </a:spcBef>
-              <a:spcAft>
-                <a:spcPts val="1400"/>
-              </a:spcAft>
-            </a:pPr>
-            <a:r>
-              <a:rPr sz="2000" b="0" i="1">
-                <a:solidFill>
-                  <a:srgbClr val="6E6E6E"/>
+              <a:t>Mama-CEO · Säule 3 · Lektion 3.5</a:t>
+            </a:r>
+          </a:p>
+        </p:txBody>
+      </p:sp>
+      <p:sp>
+        <p:nvSpPr>
+          <p:cNvPr id="5" name="TextBox 4"/>
+          <p:cNvSpPr txBox="1"/>
+          <p:nvPr/>
+        </p:nvSpPr>
+        <p:spPr>
+          <a:xfrm>
+            <a:off x="6400800" y="4754880"/>
+            <a:ext cx="2286000" cy="274320"/>
+          </a:xfrm>
+          <a:prstGeom prst="rect">
+            <a:avLst/>
+          </a:prstGeom>
+          <a:noFill/>
+        </p:spPr>
+        <p:txBody>
+          <a:bodyPr wrap="square" anchor="t" lIns="0" rIns="0" tIns="0" bIns="0">
+            <a:spAutoFit/>
+          </a:bodyPr>
+          <a:lstStyle/>
+          <a:p>
+            <a:pPr algn="r"/>
+            <a:r>
+              <a:rPr sz="900" b="0" i="0">
+                <a:solidFill>
+                  <a:srgbClr val="7A8A95"/>
                 </a:solidFill>
                 <a:latin typeface="Calibri"/>
               </a:rPr>
-              <a:t>Plan dir 30 Minuten ungestört ein — und mach mit, während du schaust.</a:t>
+              <a:t>Mum Life Balance</a:t>
             </a:r>
           </a:p>
         </p:txBody>
@@ -4607,58 +4367,14 @@
       <p:grpSpPr/>
       <p:sp>
         <p:nvSpPr>
-          <p:cNvPr id="2" name="Rectangle 1"/>
-          <p:cNvSpPr/>
-          <p:nvPr/>
-        </p:nvSpPr>
-        <p:spPr>
-          <a:xfrm>
-            <a:off x="548640" y="502920"/>
-            <a:ext cx="201168" cy="201168"/>
-          </a:xfrm>
-          <a:prstGeom prst="rect">
-            <a:avLst/>
-          </a:prstGeom>
-          <a:solidFill>
-            <a:srgbClr val="1F6F6B"/>
-          </a:solidFill>
-          <a:ln>
-            <a:noFill/>
-          </a:ln>
-          <a:effectLst/>
-        </p:spPr>
-        <p:style>
-          <a:lnRef idx="1">
-            <a:schemeClr val="accent1"/>
-          </a:lnRef>
-          <a:fillRef idx="3">
-            <a:schemeClr val="accent1"/>
-          </a:fillRef>
-          <a:effectRef idx="2">
-            <a:schemeClr val="accent1"/>
-          </a:effectRef>
-          <a:fontRef idx="minor">
-            <a:schemeClr val="lt1"/>
-          </a:fontRef>
-        </p:style>
-        <p:txBody>
-          <a:bodyPr rtlCol="0" anchor="ctr"/>
-          <a:lstStyle/>
-          <a:p>
-            <a:pPr algn="ctr"/>
-          </a:p>
-        </p:txBody>
-      </p:sp>
-      <p:sp>
-        <p:nvSpPr>
-          <p:cNvPr id="3" name="TextBox 2"/>
+          <p:cNvPr id="2" name="TextBox 1"/>
           <p:cNvSpPr txBox="1"/>
           <p:nvPr/>
         </p:nvSpPr>
         <p:spPr>
           <a:xfrm>
-            <a:off x="868680" y="457200"/>
-            <a:ext cx="10424160" cy="1005840"/>
+            <a:off x="548640" y="457200"/>
+            <a:ext cx="8046720" cy="822960"/>
           </a:xfrm>
           <a:prstGeom prst="rect">
             <a:avLst/>
@@ -4671,36 +4387,28 @@
           </a:bodyPr>
           <a:lstStyle/>
           <a:p>
-            <a:pPr algn="l">
-              <a:spcBef>
-                <a:spcPts val="0"/>
-              </a:spcBef>
-              <a:spcAft>
-                <a:spcPts val="1400"/>
-              </a:spcAft>
-            </a:pPr>
-            <a:r>
-              <a:rPr sz="3200" b="1" i="0">
-                <a:solidFill>
-                  <a:srgbClr val="1F6F6B"/>
+            <a:r>
+              <a:rPr sz="3000" b="1" i="0">
+                <a:solidFill>
+                  <a:srgbClr val="1A3A4A"/>
                 </a:solidFill>
                 <a:latin typeface="Georgia"/>
               </a:rPr>
-              <a:t>Schritt 1 — Template duplizieren</a:t>
-            </a:r>
-          </a:p>
-        </p:txBody>
-      </p:sp>
-      <p:sp>
-        <p:nvSpPr>
-          <p:cNvPr id="4" name="TextBox 3"/>
+              <a:t>So richtest du es ein</a:t>
+            </a:r>
+          </a:p>
+        </p:txBody>
+      </p:sp>
+      <p:sp>
+        <p:nvSpPr>
+          <p:cNvPr id="3" name="TextBox 2"/>
           <p:cNvSpPr txBox="1"/>
           <p:nvPr/>
         </p:nvSpPr>
         <p:spPr>
           <a:xfrm>
-            <a:off x="868680" y="1783080"/>
-            <a:ext cx="10424160" cy="4572000"/>
+            <a:off x="548640" y="1371600"/>
+            <a:ext cx="822960" cy="640080"/>
           </a:xfrm>
           <a:prstGeom prst="rect">
             <a:avLst/>
@@ -4713,60 +4421,385 @@
           </a:bodyPr>
           <a:lstStyle/>
           <a:p>
-            <a:pPr algn="l">
-              <a:spcBef>
-                <a:spcPts val="0"/>
-              </a:spcBef>
-              <a:spcAft>
-                <a:spcPts val="1400"/>
-              </a:spcAft>
-            </a:pPr>
-            <a:r>
-              <a:rPr sz="2200" b="1" i="0">
-                <a:solidFill>
-                  <a:srgbClr val="1F6F6B"/>
+            <a:r>
+              <a:rPr sz="2800" b="1" i="0">
+                <a:solidFill>
+                  <a:srgbClr val="DC822E"/>
+                </a:solidFill>
+                <a:latin typeface="Georgia"/>
+              </a:rPr>
+              <a:t>01</a:t>
+            </a:r>
+          </a:p>
+        </p:txBody>
+      </p:sp>
+      <p:sp>
+        <p:nvSpPr>
+          <p:cNvPr id="4" name="TextBox 3"/>
+          <p:cNvSpPr txBox="1"/>
+          <p:nvPr/>
+        </p:nvSpPr>
+        <p:spPr>
+          <a:xfrm>
+            <a:off x="1371600" y="1408176"/>
+            <a:ext cx="7223760" cy="713232"/>
+          </a:xfrm>
+          <a:prstGeom prst="rect">
+            <a:avLst/>
+          </a:prstGeom>
+          <a:noFill/>
+        </p:spPr>
+        <p:txBody>
+          <a:bodyPr wrap="square" anchor="t" lIns="0" rIns="0" tIns="0" bIns="0">
+            <a:spAutoFit/>
+          </a:bodyPr>
+          <a:lstStyle/>
+          <a:p>
+            <a:r>
+              <a:rPr sz="1600" b="1" i="0">
+                <a:solidFill>
+                  <a:srgbClr val="2C3E50"/>
                 </a:solidFill>
                 <a:latin typeface="Calibri"/>
               </a:rPr>
-              <a:t>Ein Klick oben rechts auf „Duplicate“.</a:t>
-            </a:r>
-          </a:p>
-          <a:p>
-            <a:pPr algn="l">
+              <a:t>Template duplizieren</a:t>
+            </a:r>
+          </a:p>
+          <a:p>
+            <a:pPr>
               <a:spcBef>
-                <a:spcPts val="0"/>
+                <a:spcPts val="100"/>
               </a:spcBef>
-              <a:spcAft>
-                <a:spcPts val="1400"/>
-              </a:spcAft>
             </a:pPr>
             <a:r>
-              <a:rPr sz="2100" b="0" i="0">
-                <a:solidFill>
-                  <a:srgbClr val="2A2A2A"/>
+              <a:rPr sz="1200" b="0" i="0">
+                <a:solidFill>
+                  <a:srgbClr val="7A8A95"/>
                 </a:solidFill>
                 <a:latin typeface="Calibri"/>
               </a:rPr>
-              <a:t>Das ganze Template landet in deinem eigenen Notion — mit allen Datenbanken.</a:t>
-            </a:r>
-          </a:p>
-          <a:p>
-            <a:pPr algn="l">
-              <a:spcBef>
-                <a:spcPts val="0"/>
-              </a:spcBef>
-              <a:spcAft>
-                <a:spcPts val="1400"/>
-              </a:spcAft>
-            </a:pPr>
-            <a:r>
-              <a:rPr sz="2000" b="0" i="1">
-                <a:solidFill>
-                  <a:srgbClr val="6E6E6E"/>
+              <a:t>1 Klick oben rechts → in deinem Notion</a:t>
+            </a:r>
+          </a:p>
+        </p:txBody>
+      </p:sp>
+      <p:sp>
+        <p:nvSpPr>
+          <p:cNvPr id="5" name="TextBox 4"/>
+          <p:cNvSpPr txBox="1"/>
+          <p:nvPr/>
+        </p:nvSpPr>
+        <p:spPr>
+          <a:xfrm>
+            <a:off x="548640" y="2084832"/>
+            <a:ext cx="822960" cy="640080"/>
+          </a:xfrm>
+          <a:prstGeom prst="rect">
+            <a:avLst/>
+          </a:prstGeom>
+          <a:noFill/>
+        </p:spPr>
+        <p:txBody>
+          <a:bodyPr wrap="square" anchor="t" lIns="0" rIns="0" tIns="0" bIns="0">
+            <a:spAutoFit/>
+          </a:bodyPr>
+          <a:lstStyle/>
+          <a:p>
+            <a:r>
+              <a:rPr sz="2800" b="1" i="0">
+                <a:solidFill>
+                  <a:srgbClr val="DC822E"/>
+                </a:solidFill>
+                <a:latin typeface="Georgia"/>
+              </a:rPr>
+              <a:t>02</a:t>
+            </a:r>
+          </a:p>
+        </p:txBody>
+      </p:sp>
+      <p:sp>
+        <p:nvSpPr>
+          <p:cNvPr id="6" name="TextBox 5"/>
+          <p:cNvSpPr txBox="1"/>
+          <p:nvPr/>
+        </p:nvSpPr>
+        <p:spPr>
+          <a:xfrm>
+            <a:off x="1371600" y="2121408"/>
+            <a:ext cx="7223760" cy="713232"/>
+          </a:xfrm>
+          <a:prstGeom prst="rect">
+            <a:avLst/>
+          </a:prstGeom>
+          <a:noFill/>
+        </p:spPr>
+        <p:txBody>
+          <a:bodyPr wrap="square" anchor="t" lIns="0" rIns="0" tIns="0" bIns="0">
+            <a:spAutoFit/>
+          </a:bodyPr>
+          <a:lstStyle/>
+          <a:p>
+            <a:r>
+              <a:rPr sz="1600" b="1" i="0">
+                <a:solidFill>
+                  <a:srgbClr val="2C3E50"/>
                 </a:solidFill>
                 <a:latin typeface="Calibri"/>
               </a:rPr>
-              <a:t>Deine Kopie, deine Daten.</a:t>
+              <a:t>Jahres-DB füllen</a:t>
+            </a:r>
+          </a:p>
+          <a:p>
+            <a:pPr>
+              <a:spcBef>
+                <a:spcPts val="100"/>
+              </a:spcBef>
+            </a:pPr>
+            <a:r>
+              <a:rPr sz="1200" b="0" i="0">
+                <a:solidFill>
+                  <a:srgbClr val="7A8A95"/>
+                </a:solidFill>
+                <a:latin typeface="Calibri"/>
+              </a:rPr>
+              <a:t>aus Arbeitsblatt 3.3 (Monats-Trio, Ferien, Anlässe)</a:t>
+            </a:r>
+          </a:p>
+        </p:txBody>
+      </p:sp>
+      <p:sp>
+        <p:nvSpPr>
+          <p:cNvPr id="7" name="TextBox 6"/>
+          <p:cNvSpPr txBox="1"/>
+          <p:nvPr/>
+        </p:nvSpPr>
+        <p:spPr>
+          <a:xfrm>
+            <a:off x="548640" y="2798064"/>
+            <a:ext cx="822960" cy="640080"/>
+          </a:xfrm>
+          <a:prstGeom prst="rect">
+            <a:avLst/>
+          </a:prstGeom>
+          <a:noFill/>
+        </p:spPr>
+        <p:txBody>
+          <a:bodyPr wrap="square" anchor="t" lIns="0" rIns="0" tIns="0" bIns="0">
+            <a:spAutoFit/>
+          </a:bodyPr>
+          <a:lstStyle/>
+          <a:p>
+            <a:r>
+              <a:rPr sz="2800" b="1" i="0">
+                <a:solidFill>
+                  <a:srgbClr val="DC822E"/>
+                </a:solidFill>
+                <a:latin typeface="Georgia"/>
+              </a:rPr>
+              <a:t>03</a:t>
+            </a:r>
+          </a:p>
+        </p:txBody>
+      </p:sp>
+      <p:sp>
+        <p:nvSpPr>
+          <p:cNvPr id="8" name="TextBox 7"/>
+          <p:cNvSpPr txBox="1"/>
+          <p:nvPr/>
+        </p:nvSpPr>
+        <p:spPr>
+          <a:xfrm>
+            <a:off x="1371600" y="2834640"/>
+            <a:ext cx="7223760" cy="713232"/>
+          </a:xfrm>
+          <a:prstGeom prst="rect">
+            <a:avLst/>
+          </a:prstGeom>
+          <a:noFill/>
+        </p:spPr>
+        <p:txBody>
+          <a:bodyPr wrap="square" anchor="t" lIns="0" rIns="0" tIns="0" bIns="0">
+            <a:spAutoFit/>
+          </a:bodyPr>
+          <a:lstStyle/>
+          <a:p>
+            <a:r>
+              <a:rPr sz="1600" b="1" i="0">
+                <a:solidFill>
+                  <a:srgbClr val="2C3E50"/>
+                </a:solidFill>
+                <a:latin typeface="Calibri"/>
+              </a:rPr>
+              <a:t>Monats-DB füllen</a:t>
+            </a:r>
+          </a:p>
+          <a:p>
+            <a:pPr>
+              <a:spcBef>
+                <a:spcPts val="100"/>
+              </a:spcBef>
+            </a:pPr>
+            <a:r>
+              <a:rPr sz="1200" b="0" i="0">
+                <a:solidFill>
+                  <a:srgbClr val="7A8A95"/>
+                </a:solidFill>
+                <a:latin typeface="Calibri"/>
+              </a:rPr>
+              <a:t>aus 3.4 + mit dem Jahr verknüpfen</a:t>
+            </a:r>
+          </a:p>
+        </p:txBody>
+      </p:sp>
+      <p:sp>
+        <p:nvSpPr>
+          <p:cNvPr id="9" name="TextBox 8"/>
+          <p:cNvSpPr txBox="1"/>
+          <p:nvPr/>
+        </p:nvSpPr>
+        <p:spPr>
+          <a:xfrm>
+            <a:off x="548640" y="3511296"/>
+            <a:ext cx="822960" cy="640080"/>
+          </a:xfrm>
+          <a:prstGeom prst="rect">
+            <a:avLst/>
+          </a:prstGeom>
+          <a:noFill/>
+        </p:spPr>
+        <p:txBody>
+          <a:bodyPr wrap="square" anchor="t" lIns="0" rIns="0" tIns="0" bIns="0">
+            <a:spAutoFit/>
+          </a:bodyPr>
+          <a:lstStyle/>
+          <a:p>
+            <a:r>
+              <a:rPr sz="2800" b="1" i="0">
+                <a:solidFill>
+                  <a:srgbClr val="DC822E"/>
+                </a:solidFill>
+                <a:latin typeface="Georgia"/>
+              </a:rPr>
+              <a:t>04</a:t>
+            </a:r>
+          </a:p>
+        </p:txBody>
+      </p:sp>
+      <p:sp>
+        <p:nvSpPr>
+          <p:cNvPr id="10" name="TextBox 9"/>
+          <p:cNvSpPr txBox="1"/>
+          <p:nvPr/>
+        </p:nvSpPr>
+        <p:spPr>
+          <a:xfrm>
+            <a:off x="1371600" y="3547872"/>
+            <a:ext cx="7223760" cy="713232"/>
+          </a:xfrm>
+          <a:prstGeom prst="rect">
+            <a:avLst/>
+          </a:prstGeom>
+          <a:noFill/>
+        </p:spPr>
+        <p:txBody>
+          <a:bodyPr wrap="square" anchor="t" lIns="0" rIns="0" tIns="0" bIns="0">
+            <a:spAutoFit/>
+          </a:bodyPr>
+          <a:lstStyle/>
+          <a:p>
+            <a:r>
+              <a:rPr sz="1600" b="1" i="0">
+                <a:solidFill>
+                  <a:srgbClr val="2C3E50"/>
+                </a:solidFill>
+                <a:latin typeface="Calibri"/>
+              </a:rPr>
+              <a:t>Wochen-DB anlegen</a:t>
+            </a:r>
+          </a:p>
+          <a:p>
+            <a:pPr>
+              <a:spcBef>
+                <a:spcPts val="100"/>
+              </a:spcBef>
+            </a:pPr>
+            <a:r>
+              <a:rPr sz="1200" b="0" i="0">
+                <a:solidFill>
+                  <a:srgbClr val="7A8A95"/>
+                </a:solidFill>
+                <a:latin typeface="Calibri"/>
+              </a:rPr>
+              <a:t>KW · Fokus-Säule · Power-Zeiten · aktive Bereiche</a:t>
+            </a:r>
+          </a:p>
+        </p:txBody>
+      </p:sp>
+      <p:sp>
+        <p:nvSpPr>
+          <p:cNvPr id="11" name="TextBox 10"/>
+          <p:cNvSpPr txBox="1"/>
+          <p:nvPr/>
+        </p:nvSpPr>
+        <p:spPr>
+          <a:xfrm>
+            <a:off x="457200" y="4754880"/>
+            <a:ext cx="5486400" cy="274320"/>
+          </a:xfrm>
+          <a:prstGeom prst="rect">
+            <a:avLst/>
+          </a:prstGeom>
+          <a:noFill/>
+        </p:spPr>
+        <p:txBody>
+          <a:bodyPr wrap="square" anchor="t" lIns="0" rIns="0" tIns="0" bIns="0">
+            <a:spAutoFit/>
+          </a:bodyPr>
+          <a:lstStyle/>
+          <a:p>
+            <a:r>
+              <a:rPr sz="900" b="0" i="0">
+                <a:solidFill>
+                  <a:srgbClr val="7A8A95"/>
+                </a:solidFill>
+                <a:latin typeface="Calibri"/>
+              </a:rPr>
+              <a:t>Mama-CEO · Säule 3 · Lektion 3.5</a:t>
+            </a:r>
+          </a:p>
+        </p:txBody>
+      </p:sp>
+      <p:sp>
+        <p:nvSpPr>
+          <p:cNvPr id="12" name="TextBox 11"/>
+          <p:cNvSpPr txBox="1"/>
+          <p:nvPr/>
+        </p:nvSpPr>
+        <p:spPr>
+          <a:xfrm>
+            <a:off x="6400800" y="4754880"/>
+            <a:ext cx="2286000" cy="274320"/>
+          </a:xfrm>
+          <a:prstGeom prst="rect">
+            <a:avLst/>
+          </a:prstGeom>
+          <a:noFill/>
+        </p:spPr>
+        <p:txBody>
+          <a:bodyPr wrap="square" anchor="t" lIns="0" rIns="0" tIns="0" bIns="0">
+            <a:spAutoFit/>
+          </a:bodyPr>
+          <a:lstStyle/>
+          <a:p>
+            <a:pPr algn="r"/>
+            <a:r>
+              <a:rPr sz="900" b="0" i="0">
+                <a:solidFill>
+                  <a:srgbClr val="7A8A95"/>
+                </a:solidFill>
+                <a:latin typeface="Calibri"/>
+              </a:rPr>
+              <a:t>Mum Life Balance</a:t>
             </a:r>
           </a:p>
         </p:txBody>
@@ -4799,20 +4832,553 @@
       <p:grpSpPr/>
       <p:sp>
         <p:nvSpPr>
-          <p:cNvPr id="2" name="Rectangle 1"/>
+          <p:cNvPr id="2" name="TextBox 1"/>
+          <p:cNvSpPr txBox="1"/>
+          <p:nvPr/>
+        </p:nvSpPr>
+        <p:spPr>
+          <a:xfrm>
+            <a:off x="548640" y="457200"/>
+            <a:ext cx="8046720" cy="822960"/>
+          </a:xfrm>
+          <a:prstGeom prst="rect">
+            <a:avLst/>
+          </a:prstGeom>
+          <a:noFill/>
+        </p:spPr>
+        <p:txBody>
+          <a:bodyPr wrap="square" anchor="t" lIns="0" rIns="0" tIns="0" bIns="0">
+            <a:spAutoFit/>
+          </a:bodyPr>
+          <a:lstStyle/>
+          <a:p>
+            <a:r>
+              <a:rPr sz="3000" b="1" i="0">
+                <a:solidFill>
+                  <a:srgbClr val="1A3A4A"/>
+                </a:solidFill>
+                <a:latin typeface="Georgia"/>
+              </a:rPr>
+              <a:t>So richtest du es ein</a:t>
+            </a:r>
+          </a:p>
+        </p:txBody>
+      </p:sp>
+      <p:sp>
+        <p:nvSpPr>
+          <p:cNvPr id="3" name="TextBox 2"/>
+          <p:cNvSpPr txBox="1"/>
+          <p:nvPr/>
+        </p:nvSpPr>
+        <p:spPr>
+          <a:xfrm>
+            <a:off x="548640" y="1188720"/>
+            <a:ext cx="8046720" cy="457200"/>
+          </a:xfrm>
+          <a:prstGeom prst="rect">
+            <a:avLst/>
+          </a:prstGeom>
+          <a:noFill/>
+        </p:spPr>
+        <p:txBody>
+          <a:bodyPr wrap="square" anchor="t" lIns="0" rIns="0" tIns="0" bIns="0">
+            <a:spAutoFit/>
+          </a:bodyPr>
+          <a:lstStyle/>
+          <a:p>
+            <a:r>
+              <a:rPr sz="1300" b="0" i="0">
+                <a:solidFill>
+                  <a:srgbClr val="7A8A95"/>
+                </a:solidFill>
+                <a:latin typeface="Calibri"/>
+              </a:rPr>
+              <a:t>… weiter:</a:t>
+            </a:r>
+          </a:p>
+        </p:txBody>
+      </p:sp>
+      <p:sp>
+        <p:nvSpPr>
+          <p:cNvPr id="4" name="TextBox 3"/>
+          <p:cNvSpPr txBox="1"/>
+          <p:nvPr/>
+        </p:nvSpPr>
+        <p:spPr>
+          <a:xfrm>
+            <a:off x="548640" y="1828800"/>
+            <a:ext cx="822960" cy="640080"/>
+          </a:xfrm>
+          <a:prstGeom prst="rect">
+            <a:avLst/>
+          </a:prstGeom>
+          <a:noFill/>
+        </p:spPr>
+        <p:txBody>
+          <a:bodyPr wrap="square" anchor="t" lIns="0" rIns="0" tIns="0" bIns="0">
+            <a:spAutoFit/>
+          </a:bodyPr>
+          <a:lstStyle/>
+          <a:p>
+            <a:r>
+              <a:rPr sz="2800" b="1" i="0">
+                <a:solidFill>
+                  <a:srgbClr val="DC822E"/>
+                </a:solidFill>
+                <a:latin typeface="Georgia"/>
+              </a:rPr>
+              <a:t>01</a:t>
+            </a:r>
+          </a:p>
+        </p:txBody>
+      </p:sp>
+      <p:sp>
+        <p:nvSpPr>
+          <p:cNvPr id="5" name="TextBox 4"/>
+          <p:cNvSpPr txBox="1"/>
+          <p:nvPr/>
+        </p:nvSpPr>
+        <p:spPr>
+          <a:xfrm>
+            <a:off x="1371600" y="1865376"/>
+            <a:ext cx="7223760" cy="662940"/>
+          </a:xfrm>
+          <a:prstGeom prst="rect">
+            <a:avLst/>
+          </a:prstGeom>
+          <a:noFill/>
+        </p:spPr>
+        <p:txBody>
+          <a:bodyPr wrap="square" anchor="t" lIns="0" rIns="0" tIns="0" bIns="0">
+            <a:spAutoFit/>
+          </a:bodyPr>
+          <a:lstStyle/>
+          <a:p>
+            <a:r>
+              <a:rPr sz="1600" b="1" i="0">
+                <a:solidFill>
+                  <a:srgbClr val="2C3E50"/>
+                </a:solidFill>
+                <a:latin typeface="Calibri"/>
+              </a:rPr>
+              <a:t>Tagesplaner anlegen</a:t>
+            </a:r>
+          </a:p>
+          <a:p>
+            <a:pPr>
+              <a:spcBef>
+                <a:spcPts val="100"/>
+              </a:spcBef>
+            </a:pPr>
+            <a:r>
+              <a:rPr sz="1200" b="0" i="0">
+                <a:solidFill>
+                  <a:srgbClr val="7A8A95"/>
+                </a:solidFill>
+                <a:latin typeface="Calibri"/>
+              </a:rPr>
+              <a:t>heute als Beispiel + mit der Woche verknüpfen</a:t>
+            </a:r>
+          </a:p>
+        </p:txBody>
+      </p:sp>
+      <p:sp>
+        <p:nvSpPr>
+          <p:cNvPr id="6" name="TextBox 5"/>
+          <p:cNvSpPr txBox="1"/>
+          <p:nvPr/>
+        </p:nvSpPr>
+        <p:spPr>
+          <a:xfrm>
+            <a:off x="548640" y="2491740"/>
+            <a:ext cx="822960" cy="640080"/>
+          </a:xfrm>
+          <a:prstGeom prst="rect">
+            <a:avLst/>
+          </a:prstGeom>
+          <a:noFill/>
+        </p:spPr>
+        <p:txBody>
+          <a:bodyPr wrap="square" anchor="t" lIns="0" rIns="0" tIns="0" bIns="0">
+            <a:spAutoFit/>
+          </a:bodyPr>
+          <a:lstStyle/>
+          <a:p>
+            <a:r>
+              <a:rPr sz="2800" b="1" i="0">
+                <a:solidFill>
+                  <a:srgbClr val="DC822E"/>
+                </a:solidFill>
+                <a:latin typeface="Georgia"/>
+              </a:rPr>
+              <a:t>02</a:t>
+            </a:r>
+          </a:p>
+        </p:txBody>
+      </p:sp>
+      <p:sp>
+        <p:nvSpPr>
+          <p:cNvPr id="7" name="TextBox 6"/>
+          <p:cNvSpPr txBox="1"/>
+          <p:nvPr/>
+        </p:nvSpPr>
+        <p:spPr>
+          <a:xfrm>
+            <a:off x="1371600" y="2528316"/>
+            <a:ext cx="7223760" cy="662940"/>
+          </a:xfrm>
+          <a:prstGeom prst="rect">
+            <a:avLst/>
+          </a:prstGeom>
+          <a:noFill/>
+        </p:spPr>
+        <p:txBody>
+          <a:bodyPr wrap="square" anchor="t" lIns="0" rIns="0" tIns="0" bIns="0">
+            <a:spAutoFit/>
+          </a:bodyPr>
+          <a:lstStyle/>
+          <a:p>
+            <a:r>
+              <a:rPr sz="1600" b="1" i="0">
+                <a:solidFill>
+                  <a:srgbClr val="2C3E50"/>
+                </a:solidFill>
+                <a:latin typeface="Calibri"/>
+              </a:rPr>
+              <a:t>Ziele verknüpfen</a:t>
+            </a:r>
+          </a:p>
+          <a:p>
+            <a:pPr>
+              <a:spcBef>
+                <a:spcPts val="100"/>
+              </a:spcBef>
+            </a:pPr>
+            <a:r>
+              <a:rPr sz="1200" b="0" i="0">
+                <a:solidFill>
+                  <a:srgbClr val="7A8A95"/>
+                </a:solidFill>
+                <a:latin typeface="Calibri"/>
+              </a:rPr>
+              <a:t>1-3 Ziele mit Jahr / Monat / Woche</a:t>
+            </a:r>
+          </a:p>
+        </p:txBody>
+      </p:sp>
+      <p:sp>
+        <p:nvSpPr>
+          <p:cNvPr id="8" name="TextBox 7"/>
+          <p:cNvSpPr txBox="1"/>
+          <p:nvPr/>
+        </p:nvSpPr>
+        <p:spPr>
+          <a:xfrm>
+            <a:off x="548640" y="3154680"/>
+            <a:ext cx="822960" cy="640080"/>
+          </a:xfrm>
+          <a:prstGeom prst="rect">
+            <a:avLst/>
+          </a:prstGeom>
+          <a:noFill/>
+        </p:spPr>
+        <p:txBody>
+          <a:bodyPr wrap="square" anchor="t" lIns="0" rIns="0" tIns="0" bIns="0">
+            <a:spAutoFit/>
+          </a:bodyPr>
+          <a:lstStyle/>
+          <a:p>
+            <a:r>
+              <a:rPr sz="2800" b="1" i="0">
+                <a:solidFill>
+                  <a:srgbClr val="DC822E"/>
+                </a:solidFill>
+                <a:latin typeface="Georgia"/>
+              </a:rPr>
+              <a:t>03</a:t>
+            </a:r>
+          </a:p>
+        </p:txBody>
+      </p:sp>
+      <p:sp>
+        <p:nvSpPr>
+          <p:cNvPr id="9" name="TextBox 8"/>
+          <p:cNvSpPr txBox="1"/>
+          <p:nvPr/>
+        </p:nvSpPr>
+        <p:spPr>
+          <a:xfrm>
+            <a:off x="1371600" y="3191256"/>
+            <a:ext cx="7223760" cy="662940"/>
+          </a:xfrm>
+          <a:prstGeom prst="rect">
+            <a:avLst/>
+          </a:prstGeom>
+          <a:noFill/>
+        </p:spPr>
+        <p:txBody>
+          <a:bodyPr wrap="square" anchor="t" lIns="0" rIns="0" tIns="0" bIns="0">
+            <a:spAutoFit/>
+          </a:bodyPr>
+          <a:lstStyle/>
+          <a:p>
+            <a:r>
+              <a:rPr sz="1600" b="1" i="0">
+                <a:solidFill>
+                  <a:srgbClr val="2C3E50"/>
+                </a:solidFill>
+                <a:latin typeface="Calibri"/>
+              </a:rPr>
+              <a:t>Rollen + Hütchen ablegen</a:t>
+            </a:r>
+          </a:p>
+          <a:p>
+            <a:pPr>
+              <a:spcBef>
+                <a:spcPts val="100"/>
+              </a:spcBef>
+            </a:pPr>
+            <a:r>
+              <a:rPr sz="1200" b="0" i="0">
+                <a:solidFill>
+                  <a:srgbClr val="7A8A95"/>
+                </a:solidFill>
+                <a:latin typeface="Calibri"/>
+              </a:rPr>
+              <a:t>deine Arbeit aus Säule 1+2 als Referenz</a:t>
+            </a:r>
+          </a:p>
+        </p:txBody>
+      </p:sp>
+      <p:sp>
+        <p:nvSpPr>
+          <p:cNvPr id="10" name="TextBox 9"/>
+          <p:cNvSpPr txBox="1"/>
+          <p:nvPr/>
+        </p:nvSpPr>
+        <p:spPr>
+          <a:xfrm>
+            <a:off x="548640" y="3817620"/>
+            <a:ext cx="822960" cy="640080"/>
+          </a:xfrm>
+          <a:prstGeom prst="rect">
+            <a:avLst/>
+          </a:prstGeom>
+          <a:noFill/>
+        </p:spPr>
+        <p:txBody>
+          <a:bodyPr wrap="square" anchor="t" lIns="0" rIns="0" tIns="0" bIns="0">
+            <a:spAutoFit/>
+          </a:bodyPr>
+          <a:lstStyle/>
+          <a:p>
+            <a:r>
+              <a:rPr sz="2800" b="1" i="0">
+                <a:solidFill>
+                  <a:srgbClr val="DC822E"/>
+                </a:solidFill>
+                <a:latin typeface="Georgia"/>
+              </a:rPr>
+              <a:t>04</a:t>
+            </a:r>
+          </a:p>
+        </p:txBody>
+      </p:sp>
+      <p:sp>
+        <p:nvSpPr>
+          <p:cNvPr id="11" name="TextBox 10"/>
+          <p:cNvSpPr txBox="1"/>
+          <p:nvPr/>
+        </p:nvSpPr>
+        <p:spPr>
+          <a:xfrm>
+            <a:off x="1371600" y="3854196"/>
+            <a:ext cx="7223760" cy="662940"/>
+          </a:xfrm>
+          <a:prstGeom prst="rect">
+            <a:avLst/>
+          </a:prstGeom>
+          <a:noFill/>
+        </p:spPr>
+        <p:txBody>
+          <a:bodyPr wrap="square" anchor="t" lIns="0" rIns="0" tIns="0" bIns="0">
+            <a:spAutoFit/>
+          </a:bodyPr>
+          <a:lstStyle/>
+          <a:p>
+            <a:r>
+              <a:rPr sz="1600" b="1" i="0">
+                <a:solidFill>
+                  <a:srgbClr val="2C3E50"/>
+                </a:solidFill>
+                <a:latin typeface="Calibri"/>
+              </a:rPr>
+              <a:t>90-Tage-Tracker scharf stellen</a:t>
+            </a:r>
+          </a:p>
+          <a:p>
+            <a:pPr>
+              <a:spcBef>
+                <a:spcPts val="100"/>
+              </a:spcBef>
+            </a:pPr>
+            <a:r>
+              <a:rPr sz="1200" b="0" i="0">
+                <a:solidFill>
+                  <a:srgbClr val="7A8A95"/>
+                </a:solidFill>
+                <a:latin typeface="Calibri"/>
+              </a:rPr>
+              <a:t>dein Mini-Quartals-Plan</a:t>
+            </a:r>
+          </a:p>
+        </p:txBody>
+      </p:sp>
+      <p:sp>
+        <p:nvSpPr>
+          <p:cNvPr id="12" name="TextBox 11"/>
+          <p:cNvSpPr txBox="1"/>
+          <p:nvPr/>
+        </p:nvSpPr>
+        <p:spPr>
+          <a:xfrm>
+            <a:off x="457200" y="4754880"/>
+            <a:ext cx="5486400" cy="274320"/>
+          </a:xfrm>
+          <a:prstGeom prst="rect">
+            <a:avLst/>
+          </a:prstGeom>
+          <a:noFill/>
+        </p:spPr>
+        <p:txBody>
+          <a:bodyPr wrap="square" anchor="t" lIns="0" rIns="0" tIns="0" bIns="0">
+            <a:spAutoFit/>
+          </a:bodyPr>
+          <a:lstStyle/>
+          <a:p>
+            <a:r>
+              <a:rPr sz="900" b="0" i="0">
+                <a:solidFill>
+                  <a:srgbClr val="7A8A95"/>
+                </a:solidFill>
+                <a:latin typeface="Calibri"/>
+              </a:rPr>
+              <a:t>Mama-CEO · Säule 3 · Lektion 3.5</a:t>
+            </a:r>
+          </a:p>
+        </p:txBody>
+      </p:sp>
+      <p:sp>
+        <p:nvSpPr>
+          <p:cNvPr id="13" name="TextBox 12"/>
+          <p:cNvSpPr txBox="1"/>
+          <p:nvPr/>
+        </p:nvSpPr>
+        <p:spPr>
+          <a:xfrm>
+            <a:off x="6400800" y="4754880"/>
+            <a:ext cx="2286000" cy="274320"/>
+          </a:xfrm>
+          <a:prstGeom prst="rect">
+            <a:avLst/>
+          </a:prstGeom>
+          <a:noFill/>
+        </p:spPr>
+        <p:txBody>
+          <a:bodyPr wrap="square" anchor="t" lIns="0" rIns="0" tIns="0" bIns="0">
+            <a:spAutoFit/>
+          </a:bodyPr>
+          <a:lstStyle/>
+          <a:p>
+            <a:pPr algn="r"/>
+            <a:r>
+              <a:rPr sz="900" b="0" i="0">
+                <a:solidFill>
+                  <a:srgbClr val="7A8A95"/>
+                </a:solidFill>
+                <a:latin typeface="Calibri"/>
+              </a:rPr>
+              <a:t>Mum Life Balance</a:t>
+            </a:r>
+          </a:p>
+        </p:txBody>
+      </p:sp>
+    </p:spTree>
+  </p:cSld>
+  <p:clrMapOvr>
+    <a:masterClrMapping/>
+  </p:clrMapOvr>
+</p:sld>
+</file>
+
+<file path=ppt/slides/slide5.xml><?xml version="1.0" encoding="utf-8"?>
+<p:sld xmlns:a="http://schemas.openxmlformats.org/drawingml/2006/main" xmlns:p="http://schemas.openxmlformats.org/presentationml/2006/main" xmlns:r="http://schemas.openxmlformats.org/officeDocument/2006/relationships">
+  <p:cSld>
+    <p:bg>
+      <p:bgPr>
+        <a:solidFill>
+          <a:srgbClr val="12828C"/>
+        </a:solidFill>
+        <a:effectLst/>
+      </p:bgPr>
+    </p:bg>
+    <p:spTree>
+      <p:nvGrpSpPr>
+        <p:cNvPr id="1" name=""/>
+        <p:cNvGrpSpPr/>
+        <p:nvPr/>
+      </p:nvGrpSpPr>
+      <p:grpSpPr/>
+      <p:sp>
+        <p:nvSpPr>
+          <p:cNvPr id="2" name="TextBox 1"/>
+          <p:cNvSpPr txBox="1"/>
+          <p:nvPr/>
+        </p:nvSpPr>
+        <p:spPr>
+          <a:xfrm>
+            <a:off x="548640" y="1097280"/>
+            <a:ext cx="8046720" cy="365760"/>
+          </a:xfrm>
+          <a:prstGeom prst="rect">
+            <a:avLst/>
+          </a:prstGeom>
+          <a:noFill/>
+        </p:spPr>
+        <p:txBody>
+          <a:bodyPr wrap="square" anchor="t" lIns="0" rIns="0" tIns="0" bIns="0">
+            <a:spAutoFit/>
+          </a:bodyPr>
+          <a:lstStyle/>
+          <a:p>
+            <a:r>
+              <a:rPr sz="1100" b="1" i="0">
+                <a:solidFill>
+                  <a:srgbClr val="DC822E"/>
+                </a:solidFill>
+                <a:latin typeface="Calibri"/>
+              </a:rPr>
+              <a:t>UND DAS BESTE</a:t>
+            </a:r>
+          </a:p>
+        </p:txBody>
+      </p:sp>
+      <p:sp>
+        <p:nvSpPr>
+          <p:cNvPr id="3" name="Rectangle 2"/>
           <p:cNvSpPr/>
           <p:nvPr/>
         </p:nvSpPr>
         <p:spPr>
           <a:xfrm>
-            <a:off x="548640" y="502920"/>
-            <a:ext cx="201168" cy="201168"/>
+            <a:off x="548640" y="1554480"/>
+            <a:ext cx="548640" cy="45720"/>
           </a:xfrm>
           <a:prstGeom prst="rect">
             <a:avLst/>
           </a:prstGeom>
           <a:solidFill>
-            <a:srgbClr val="1F6F6B"/>
+            <a:srgbClr val="DC822E"/>
           </a:solidFill>
           <a:ln>
             <a:noFill/>
@@ -4843,14 +5409,14 @@
       </p:sp>
       <p:sp>
         <p:nvSpPr>
-          <p:cNvPr id="3" name="TextBox 2"/>
+          <p:cNvPr id="4" name="TextBox 3"/>
           <p:cNvSpPr txBox="1"/>
           <p:nvPr/>
         </p:nvSpPr>
         <p:spPr>
           <a:xfrm>
-            <a:off x="868680" y="457200"/>
-            <a:ext cx="10424160" cy="1005840"/>
+            <a:off x="548640" y="1920240"/>
+            <a:ext cx="8046720" cy="2194560"/>
           </a:xfrm>
           <a:prstGeom prst="rect">
             <a:avLst/>
@@ -4863,36 +5429,28 @@
           </a:bodyPr>
           <a:lstStyle/>
           <a:p>
-            <a:pPr algn="l">
-              <a:spcBef>
-                <a:spcPts val="0"/>
-              </a:spcBef>
-              <a:spcAft>
-                <a:spcPts val="1400"/>
-              </a:spcAft>
-            </a:pPr>
-            <a:r>
-              <a:rPr sz="3200" b="1" i="0">
-                <a:solidFill>
-                  <a:srgbClr val="1F6F6B"/>
+            <a:r>
+              <a:rPr sz="2800" b="1" i="0">
+                <a:solidFill>
+                  <a:srgbClr val="F1ECDD"/>
                 </a:solidFill>
                 <a:latin typeface="Georgia"/>
               </a:rPr>
-              <a:t>Schritt 2 — Jahres-DB füllen</a:t>
-            </a:r>
-          </a:p>
-        </p:txBody>
-      </p:sp>
-      <p:sp>
-        <p:nvSpPr>
-          <p:cNvPr id="4" name="TextBox 3"/>
+              <a:t>Genau das liest später dein Cockpit-Bot.</a:t>
+            </a:r>
+          </a:p>
+        </p:txBody>
+      </p:sp>
+      <p:sp>
+        <p:nvSpPr>
+          <p:cNvPr id="5" name="TextBox 4"/>
           <p:cNvSpPr txBox="1"/>
           <p:nvPr/>
         </p:nvSpPr>
         <p:spPr>
           <a:xfrm>
-            <a:off x="868680" y="1783080"/>
-            <a:ext cx="10424160" cy="4572000"/>
+            <a:off x="548640" y="3703320"/>
+            <a:ext cx="8046720" cy="731520"/>
           </a:xfrm>
           <a:prstGeom prst="rect">
             <a:avLst/>
@@ -4905,144 +5463,28 @@
           </a:bodyPr>
           <a:lstStyle/>
           <a:p>
-            <a:pPr algn="l">
-              <a:spcBef>
-                <a:spcPts val="0"/>
-              </a:spcBef>
-              <a:spcAft>
-                <a:spcPts val="1400"/>
-              </a:spcAft>
-            </a:pPr>
-            <a:r>
-              <a:rPr sz="2200" b="1" i="0">
-                <a:solidFill>
-                  <a:srgbClr val="1F6F6B"/>
+            <a:r>
+              <a:rPr sz="1500" b="0" i="1">
+                <a:solidFill>
+                  <a:srgbClr val="F1ECDD"/>
                 </a:solidFill>
                 <a:latin typeface="Calibri"/>
               </a:rPr>
-              <a:t>Trag deine Jahres-Strategie aus Arbeitsblatt 3.3 ein.</a:t>
-            </a:r>
-          </a:p>
-          <a:p>
-            <a:pPr algn="l">
-              <a:spcBef>
-                <a:spcPts val="0"/>
-              </a:spcBef>
-              <a:spcAft>
-                <a:spcPts val="1400"/>
-              </a:spcAft>
-            </a:pPr>
-            <a:r>
-              <a:rPr sz="2100" b="0" i="0">
-                <a:solidFill>
-                  <a:srgbClr val="2A2A2A"/>
-                </a:solidFill>
-                <a:latin typeface="Calibri"/>
-              </a:rPr>
-              <a:t>Monats-Trio (Gratis · Mini · Gross), Ferien, Anlässe.</a:t>
-            </a:r>
-          </a:p>
-          <a:p>
-            <a:pPr algn="l">
-              <a:spcBef>
-                <a:spcPts val="0"/>
-              </a:spcBef>
-              <a:spcAft>
-                <a:spcPts val="1400"/>
-              </a:spcAft>
-            </a:pPr>
-            <a:r>
-              <a:rPr sz="2000" b="0" i="1">
-                <a:solidFill>
-                  <a:srgbClr val="6E6E6E"/>
-                </a:solidFill>
-                <a:latin typeface="Calibri"/>
-              </a:rPr>
-              <a:t>Grob reicht — es darf wachsen.</a:t>
-            </a:r>
-          </a:p>
-        </p:txBody>
-      </p:sp>
-    </p:spTree>
-  </p:cSld>
-  <p:clrMapOvr>
-    <a:masterClrMapping/>
-  </p:clrMapOvr>
-</p:sld>
-</file>
-
-<file path=ppt/slides/slide5.xml><?xml version="1.0" encoding="utf-8"?>
-<p:sld xmlns:a="http://schemas.openxmlformats.org/drawingml/2006/main" xmlns:p="http://schemas.openxmlformats.org/presentationml/2006/main" xmlns:r="http://schemas.openxmlformats.org/officeDocument/2006/relationships">
-  <p:cSld>
-    <p:bg>
-      <p:bgPr>
-        <a:solidFill>
-          <a:srgbClr val="FFFFFF"/>
-        </a:solidFill>
-        <a:effectLst/>
-      </p:bgPr>
-    </p:bg>
-    <p:spTree>
-      <p:nvGrpSpPr>
-        <p:cNvPr id="1" name=""/>
-        <p:cNvGrpSpPr/>
-        <p:nvPr/>
-      </p:nvGrpSpPr>
-      <p:grpSpPr/>
-      <p:sp>
-        <p:nvSpPr>
-          <p:cNvPr id="2" name="Rectangle 1"/>
-          <p:cNvSpPr/>
-          <p:nvPr/>
-        </p:nvSpPr>
-        <p:spPr>
-          <a:xfrm>
-            <a:off x="548640" y="502920"/>
-            <a:ext cx="201168" cy="201168"/>
-          </a:xfrm>
-          <a:prstGeom prst="rect">
-            <a:avLst/>
-          </a:prstGeom>
-          <a:solidFill>
-            <a:srgbClr val="1F6F6B"/>
-          </a:solidFill>
-          <a:ln>
-            <a:noFill/>
-          </a:ln>
-          <a:effectLst/>
-        </p:spPr>
-        <p:style>
-          <a:lnRef idx="1">
-            <a:schemeClr val="accent1"/>
-          </a:lnRef>
-          <a:fillRef idx="3">
-            <a:schemeClr val="accent1"/>
-          </a:fillRef>
-          <a:effectRef idx="2">
-            <a:schemeClr val="accent1"/>
-          </a:effectRef>
-          <a:fontRef idx="minor">
-            <a:schemeClr val="lt1"/>
-          </a:fontRef>
-        </p:style>
-        <p:txBody>
-          <a:bodyPr rtlCol="0" anchor="ctr"/>
-          <a:lstStyle/>
-          <a:p>
-            <a:pPr algn="ctr"/>
-          </a:p>
-        </p:txBody>
-      </p:sp>
-      <p:sp>
-        <p:nvSpPr>
-          <p:cNvPr id="3" name="TextBox 2"/>
+              <a:t>Weil alles verknüpft in Notion steht, brieft er dich morgens per Telegram. (Bot = Säule 4.)</a:t>
+            </a:r>
+          </a:p>
+        </p:txBody>
+      </p:sp>
+      <p:sp>
+        <p:nvSpPr>
+          <p:cNvPr id="6" name="TextBox 5"/>
           <p:cNvSpPr txBox="1"/>
           <p:nvPr/>
         </p:nvSpPr>
         <p:spPr>
           <a:xfrm>
-            <a:off x="868680" y="457200"/>
-            <a:ext cx="10424160" cy="1005840"/>
+            <a:off x="457200" y="4754880"/>
+            <a:ext cx="5486400" cy="274320"/>
           </a:xfrm>
           <a:prstGeom prst="rect">
             <a:avLst/>
@@ -5055,36 +5497,28 @@
           </a:bodyPr>
           <a:lstStyle/>
           <a:p>
-            <a:pPr algn="l">
-              <a:spcBef>
-                <a:spcPts val="0"/>
-              </a:spcBef>
-              <a:spcAft>
-                <a:spcPts val="1400"/>
-              </a:spcAft>
-            </a:pPr>
-            <a:r>
-              <a:rPr sz="3200" b="1" i="0">
-                <a:solidFill>
-                  <a:srgbClr val="1F6F6B"/>
-                </a:solidFill>
-                <a:latin typeface="Georgia"/>
+            <a:r>
+              <a:rPr sz="900" b="0" i="0">
+                <a:solidFill>
+                  <a:srgbClr val="F1ECDD"/>
+                </a:solidFill>
+                <a:latin typeface="Calibri"/>
               </a:rPr>
-              <a:t>Schritt 3 — Monats-DB füllen</a:t>
-            </a:r>
-          </a:p>
-        </p:txBody>
-      </p:sp>
-      <p:sp>
-        <p:nvSpPr>
-          <p:cNvPr id="4" name="TextBox 3"/>
+              <a:t>Mama-CEO · Säule 3 · Lektion 3.5</a:t>
+            </a:r>
+          </a:p>
+        </p:txBody>
+      </p:sp>
+      <p:sp>
+        <p:nvSpPr>
+          <p:cNvPr id="7" name="TextBox 6"/>
           <p:cNvSpPr txBox="1"/>
           <p:nvPr/>
         </p:nvSpPr>
         <p:spPr>
           <a:xfrm>
-            <a:off x="868680" y="1783080"/>
-            <a:ext cx="10424160" cy="4572000"/>
+            <a:off x="6400800" y="4754880"/>
+            <a:ext cx="2286000" cy="274320"/>
           </a:xfrm>
           <a:prstGeom prst="rect">
             <a:avLst/>
@@ -5097,60 +5531,15 @@
           </a:bodyPr>
           <a:lstStyle/>
           <a:p>
-            <a:pPr algn="l">
-              <a:spcBef>
-                <a:spcPts val="0"/>
-              </a:spcBef>
-              <a:spcAft>
-                <a:spcPts val="1400"/>
-              </a:spcAft>
-            </a:pPr>
-            <a:r>
-              <a:rPr sz="2200" b="1" i="0">
-                <a:solidFill>
-                  <a:srgbClr val="1F6F6B"/>
+            <a:pPr algn="r"/>
+            <a:r>
+              <a:rPr sz="900" b="0" i="0">
+                <a:solidFill>
+                  <a:srgbClr val="F1ECDD"/>
                 </a:solidFill>
                 <a:latin typeface="Calibri"/>
               </a:rPr>
-              <a:t>Übertrag deinen Monatsplan aus Arbeitsblatt 3.4.</a:t>
-            </a:r>
-          </a:p>
-          <a:p>
-            <a:pPr algn="l">
-              <a:spcBef>
-                <a:spcPts val="0"/>
-              </a:spcBef>
-              <a:spcAft>
-                <a:spcPts val="1400"/>
-              </a:spcAft>
-            </a:pPr>
-            <a:r>
-              <a:rPr sz="2100" b="0" i="0">
-                <a:solidFill>
-                  <a:srgbClr val="2A2A2A"/>
-                </a:solidFill>
-                <a:latin typeface="Calibri"/>
-              </a:rPr>
-              <a:t>Fokus + 3 Ziele + aktive Bereiche.</a:t>
-            </a:r>
-          </a:p>
-          <a:p>
-            <a:pPr algn="l">
-              <a:spcBef>
-                <a:spcPts val="0"/>
-              </a:spcBef>
-              <a:spcAft>
-                <a:spcPts val="1400"/>
-              </a:spcAft>
-            </a:pPr>
-            <a:r>
-              <a:rPr sz="2000" b="0" i="1">
-                <a:solidFill>
-                  <a:srgbClr val="6E6E6E"/>
-                </a:solidFill>
-                <a:latin typeface="Calibri"/>
-              </a:rPr>
-              <a:t>Verknüpf den Monat mit dem passenden Jahr-Eintrag.</a:t>
+              <a:t>Mum Life Balance</a:t>
             </a:r>
           </a:p>
         </p:txBody>
@@ -5183,20 +5572,54 @@
       <p:grpSpPr/>
       <p:sp>
         <p:nvSpPr>
-          <p:cNvPr id="2" name="Rectangle 1"/>
+          <p:cNvPr id="2" name="TextBox 1"/>
+          <p:cNvSpPr txBox="1"/>
+          <p:nvPr/>
+        </p:nvSpPr>
+        <p:spPr>
+          <a:xfrm>
+            <a:off x="548640" y="457200"/>
+            <a:ext cx="8046720" cy="822960"/>
+          </a:xfrm>
+          <a:prstGeom prst="rect">
+            <a:avLst/>
+          </a:prstGeom>
+          <a:noFill/>
+        </p:spPr>
+        <p:txBody>
+          <a:bodyPr wrap="square" anchor="t" lIns="0" rIns="0" tIns="0" bIns="0">
+            <a:spAutoFit/>
+          </a:bodyPr>
+          <a:lstStyle/>
+          <a:p>
+            <a:r>
+              <a:rPr sz="3000" b="1" i="0">
+                <a:solidFill>
+                  <a:srgbClr val="1A3A4A"/>
+                </a:solidFill>
+                <a:latin typeface="Georgia"/>
+              </a:rPr>
+              <a:t>Dein nächster Schritt</a:t>
+            </a:r>
+          </a:p>
+        </p:txBody>
+      </p:sp>
+      <p:sp>
+        <p:nvSpPr>
+          <p:cNvPr id="3" name="Rectangle 2"/>
           <p:cNvSpPr/>
           <p:nvPr/>
         </p:nvSpPr>
         <p:spPr>
           <a:xfrm>
-            <a:off x="548640" y="502920"/>
-            <a:ext cx="201168" cy="201168"/>
+            <a:off x="548640" y="1737360"/>
+            <a:ext cx="3931920" cy="2743200"/>
           </a:xfrm>
           <a:prstGeom prst="rect">
             <a:avLst/>
           </a:prstGeom>
           <a:solidFill>
-            <a:srgbClr val="1F6F6B"/>
+            <a:srgbClr val="F1ECDD"/>
           </a:solidFill>
           <a:ln>
             <a:noFill/>
@@ -5227,168 +5650,20 @@
       </p:sp>
       <p:sp>
         <p:nvSpPr>
-          <p:cNvPr id="3" name="TextBox 2"/>
-          <p:cNvSpPr txBox="1"/>
-          <p:nvPr/>
-        </p:nvSpPr>
-        <p:spPr>
-          <a:xfrm>
-            <a:off x="868680" y="457200"/>
-            <a:ext cx="10424160" cy="1005840"/>
-          </a:xfrm>
-          <a:prstGeom prst="rect">
-            <a:avLst/>
-          </a:prstGeom>
-          <a:noFill/>
-        </p:spPr>
-        <p:txBody>
-          <a:bodyPr wrap="square" anchor="t" lIns="0" rIns="0" tIns="0" bIns="0">
-            <a:spAutoFit/>
-          </a:bodyPr>
-          <a:lstStyle/>
-          <a:p>
-            <a:pPr algn="l">
-              <a:spcBef>
-                <a:spcPts val="0"/>
-              </a:spcBef>
-              <a:spcAft>
-                <a:spcPts val="1400"/>
-              </a:spcAft>
-            </a:pPr>
-            <a:r>
-              <a:rPr sz="3200" b="1" i="0">
-                <a:solidFill>
-                  <a:srgbClr val="1F6F6B"/>
-                </a:solidFill>
-                <a:latin typeface="Georgia"/>
-              </a:rPr>
-              <a:t>Schritt 4 — Wochen-DB anlegen</a:t>
-            </a:r>
-          </a:p>
-        </p:txBody>
-      </p:sp>
-      <p:sp>
-        <p:nvSpPr>
-          <p:cNvPr id="4" name="TextBox 3"/>
-          <p:cNvSpPr txBox="1"/>
-          <p:nvPr/>
-        </p:nvSpPr>
-        <p:spPr>
-          <a:xfrm>
-            <a:off x="868680" y="1783080"/>
-            <a:ext cx="10424160" cy="4572000"/>
-          </a:xfrm>
-          <a:prstGeom prst="rect">
-            <a:avLst/>
-          </a:prstGeom>
-          <a:noFill/>
-        </p:spPr>
-        <p:txBody>
-          <a:bodyPr wrap="square" anchor="t" lIns="0" rIns="0" tIns="0" bIns="0">
-            <a:spAutoFit/>
-          </a:bodyPr>
-          <a:lstStyle/>
-          <a:p>
-            <a:pPr algn="l">
-              <a:spcBef>
-                <a:spcPts val="0"/>
-              </a:spcBef>
-              <a:spcAft>
-                <a:spcPts val="1400"/>
-              </a:spcAft>
-            </a:pPr>
-            <a:r>
-              <a:rPr sz="2200" b="1" i="0">
-                <a:solidFill>
-                  <a:srgbClr val="1F6F6B"/>
-                </a:solidFill>
-                <a:latin typeface="Calibri"/>
-              </a:rPr>
-              <a:t>Leg deine aktuelle Woche an.</a:t>
-            </a:r>
-          </a:p>
-          <a:p>
-            <a:pPr algn="l">
-              <a:spcBef>
-                <a:spcPts val="0"/>
-              </a:spcBef>
-              <a:spcAft>
-                <a:spcPts val="1400"/>
-              </a:spcAft>
-            </a:pPr>
-            <a:r>
-              <a:rPr sz="2100" b="0" i="0">
-                <a:solidFill>
-                  <a:srgbClr val="2A2A2A"/>
-                </a:solidFill>
-                <a:latin typeface="Calibri"/>
-              </a:rPr>
-              <a:t>KW · Fokus-Säule · Power-Zeiten · aktive Bereiche.</a:t>
-            </a:r>
-          </a:p>
-          <a:p>
-            <a:pPr algn="l">
-              <a:spcBef>
-                <a:spcPts val="0"/>
-              </a:spcBef>
-              <a:spcAft>
-                <a:spcPts val="1400"/>
-              </a:spcAft>
-            </a:pPr>
-            <a:r>
-              <a:rPr sz="2000" b="0" i="1">
-                <a:solidFill>
-                  <a:srgbClr val="6E6E6E"/>
-                </a:solidFill>
-                <a:latin typeface="Calibri"/>
-              </a:rPr>
-              <a:t>Verknüpf die Woche mit dem Monat.</a:t>
-            </a:r>
-          </a:p>
-        </p:txBody>
-      </p:sp>
-    </p:spTree>
-  </p:cSld>
-  <p:clrMapOvr>
-    <a:masterClrMapping/>
-  </p:clrMapOvr>
-</p:sld>
-</file>
-
-<file path=ppt/slides/slide7.xml><?xml version="1.0" encoding="utf-8"?>
-<p:sld xmlns:a="http://schemas.openxmlformats.org/drawingml/2006/main" xmlns:p="http://schemas.openxmlformats.org/presentationml/2006/main" xmlns:r="http://schemas.openxmlformats.org/officeDocument/2006/relationships">
-  <p:cSld>
-    <p:bg>
-      <p:bgPr>
-        <a:solidFill>
-          <a:srgbClr val="FFFFFF"/>
-        </a:solidFill>
-        <a:effectLst/>
-      </p:bgPr>
-    </p:bg>
-    <p:spTree>
-      <p:nvGrpSpPr>
-        <p:cNvPr id="1" name=""/>
-        <p:cNvGrpSpPr/>
-        <p:nvPr/>
-      </p:nvGrpSpPr>
-      <p:grpSpPr/>
-      <p:sp>
-        <p:nvSpPr>
-          <p:cNvPr id="2" name="Rectangle 1"/>
+          <p:cNvPr id="4" name="Rectangle 3"/>
           <p:cNvSpPr/>
           <p:nvPr/>
         </p:nvSpPr>
         <p:spPr>
           <a:xfrm>
-            <a:off x="548640" y="502920"/>
-            <a:ext cx="201168" cy="201168"/>
+            <a:off x="548640" y="1737360"/>
+            <a:ext cx="3931920" cy="91440"/>
           </a:xfrm>
           <a:prstGeom prst="rect">
             <a:avLst/>
           </a:prstGeom>
           <a:solidFill>
-            <a:srgbClr val="1F6F6B"/>
+            <a:srgbClr val="12828C"/>
           </a:solidFill>
           <a:ln>
             <a:noFill/>
@@ -5419,14 +5694,14 @@
       </p:sp>
       <p:sp>
         <p:nvSpPr>
-          <p:cNvPr id="3" name="TextBox 2"/>
+          <p:cNvPr id="5" name="TextBox 4"/>
           <p:cNvSpPr txBox="1"/>
           <p:nvPr/>
         </p:nvSpPr>
         <p:spPr>
           <a:xfrm>
-            <a:off x="868680" y="457200"/>
-            <a:ext cx="10424160" cy="1005840"/>
+            <a:off x="731520" y="1920240"/>
+            <a:ext cx="3657600" cy="274320"/>
           </a:xfrm>
           <a:prstGeom prst="rect">
             <a:avLst/>
@@ -5439,36 +5714,28 @@
           </a:bodyPr>
           <a:lstStyle/>
           <a:p>
-            <a:pPr algn="l">
-              <a:spcBef>
-                <a:spcPts val="0"/>
-              </a:spcBef>
-              <a:spcAft>
-                <a:spcPts val="1400"/>
-              </a:spcAft>
-            </a:pPr>
-            <a:r>
-              <a:rPr sz="3200" b="1" i="0">
-                <a:solidFill>
-                  <a:srgbClr val="1F6F6B"/>
-                </a:solidFill>
-                <a:latin typeface="Georgia"/>
+            <a:r>
+              <a:rPr sz="1000" b="1" i="0">
+                <a:solidFill>
+                  <a:srgbClr val="0D6168"/>
+                </a:solidFill>
+                <a:latin typeface="Calibri"/>
               </a:rPr>
-              <a:t>Schritt 5 — Tagesplaner</a:t>
-            </a:r>
-          </a:p>
-        </p:txBody>
-      </p:sp>
-      <p:sp>
-        <p:nvSpPr>
-          <p:cNvPr id="4" name="TextBox 3"/>
+              <a:t>📋  ARBEITSBLATT</a:t>
+            </a:r>
+          </a:p>
+        </p:txBody>
+      </p:sp>
+      <p:sp>
+        <p:nvSpPr>
+          <p:cNvPr id="6" name="TextBox 5"/>
           <p:cNvSpPr txBox="1"/>
           <p:nvPr/>
         </p:nvSpPr>
         <p:spPr>
           <a:xfrm>
-            <a:off x="868680" y="1783080"/>
-            <a:ext cx="10424160" cy="4572000"/>
+            <a:off x="731520" y="2286000"/>
+            <a:ext cx="3657600" cy="548640"/>
           </a:xfrm>
           <a:prstGeom prst="rect">
             <a:avLst/>
@@ -5481,106 +5748,68 @@
           </a:bodyPr>
           <a:lstStyle/>
           <a:p>
-            <a:pPr algn="l">
-              <a:spcBef>
-                <a:spcPts val="0"/>
-              </a:spcBef>
-              <a:spcAft>
-                <a:spcPts val="1400"/>
-              </a:spcAft>
-            </a:pPr>
-            <a:r>
-              <a:rPr sz="2200" b="1" i="0">
-                <a:solidFill>
-                  <a:srgbClr val="1F6F6B"/>
+            <a:r>
+              <a:rPr sz="1600" b="1" i="0">
+                <a:solidFill>
+                  <a:srgbClr val="1A3A4A"/>
+                </a:solidFill>
+                <a:latin typeface="Georgia"/>
+              </a:rPr>
+              <a:t>Einricht-Checkliste</a:t>
+            </a:r>
+          </a:p>
+        </p:txBody>
+      </p:sp>
+      <p:sp>
+        <p:nvSpPr>
+          <p:cNvPr id="7" name="TextBox 6"/>
+          <p:cNvSpPr txBox="1"/>
+          <p:nvPr/>
+        </p:nvSpPr>
+        <p:spPr>
+          <a:xfrm>
+            <a:off x="731520" y="2880360"/>
+            <a:ext cx="3566160" cy="1463040"/>
+          </a:xfrm>
+          <a:prstGeom prst="rect">
+            <a:avLst/>
+          </a:prstGeom>
+          <a:noFill/>
+        </p:spPr>
+        <p:txBody>
+          <a:bodyPr wrap="square" anchor="t" lIns="0" rIns="0" tIns="0" bIns="0">
+            <a:spAutoFit/>
+          </a:bodyPr>
+          <a:lstStyle/>
+          <a:p>
+            <a:r>
+              <a:rPr sz="1250" b="0" i="0">
+                <a:solidFill>
+                  <a:srgbClr val="2C3E50"/>
                 </a:solidFill>
                 <a:latin typeface="Calibri"/>
               </a:rPr>
-              <a:t>Leg den heutigen Tag als Beispiel an.</a:t>
-            </a:r>
-          </a:p>
-          <a:p>
-            <a:pPr algn="l">
-              <a:spcBef>
-                <a:spcPts val="0"/>
-              </a:spcBef>
-              <a:spcAft>
-                <a:spcPts val="1400"/>
-              </a:spcAft>
-            </a:pPr>
-            <a:r>
-              <a:rPr sz="2100" b="0" i="0">
-                <a:solidFill>
-                  <a:srgbClr val="2A2A2A"/>
-                </a:solidFill>
-                <a:latin typeface="Calibri"/>
-              </a:rPr>
-              <a:t>Tagesfokus + 3 Hauptaufgaben aus deiner Aufgaben-Liste.</a:t>
-            </a:r>
-          </a:p>
-          <a:p>
-            <a:pPr algn="l">
-              <a:spcBef>
-                <a:spcPts val="0"/>
-              </a:spcBef>
-              <a:spcAft>
-                <a:spcPts val="1400"/>
-              </a:spcAft>
-            </a:pPr>
-            <a:r>
-              <a:rPr sz="2000" b="0" i="1">
-                <a:solidFill>
-                  <a:srgbClr val="6E6E6E"/>
-                </a:solidFill>
-                <a:latin typeface="Calibri"/>
-              </a:rPr>
-              <a:t>Verknüpf den Tag mit der Woche.</a:t>
-            </a:r>
-          </a:p>
-        </p:txBody>
-      </p:sp>
-    </p:spTree>
-  </p:cSld>
-  <p:clrMapOvr>
-    <a:masterClrMapping/>
-  </p:clrMapOvr>
-</p:sld>
-</file>
-
-<file path=ppt/slides/slide8.xml><?xml version="1.0" encoding="utf-8"?>
-<p:sld xmlns:a="http://schemas.openxmlformats.org/drawingml/2006/main" xmlns:p="http://schemas.openxmlformats.org/presentationml/2006/main" xmlns:r="http://schemas.openxmlformats.org/officeDocument/2006/relationships">
-  <p:cSld>
-    <p:bg>
-      <p:bgPr>
-        <a:solidFill>
-          <a:srgbClr val="FFFFFF"/>
-        </a:solidFill>
-        <a:effectLst/>
-      </p:bgPr>
-    </p:bg>
-    <p:spTree>
-      <p:nvGrpSpPr>
-        <p:cNvPr id="1" name=""/>
-        <p:cNvGrpSpPr/>
-        <p:nvPr/>
-      </p:nvGrpSpPr>
-      <p:grpSpPr/>
-      <p:sp>
-        <p:nvSpPr>
-          <p:cNvPr id="2" name="Rectangle 1"/>
+              <a:t>Hak im Arbeitsblatt jeden Schritt ab. Notier dir deine eine offene Frage für den Live-Call.</a:t>
+            </a:r>
+          </a:p>
+        </p:txBody>
+      </p:sp>
+      <p:sp>
+        <p:nvSpPr>
+          <p:cNvPr id="8" name="Rectangle 7"/>
           <p:cNvSpPr/>
           <p:nvPr/>
         </p:nvSpPr>
         <p:spPr>
           <a:xfrm>
-            <a:off x="548640" y="502920"/>
-            <a:ext cx="201168" cy="201168"/>
+            <a:off x="4663440" y="1737360"/>
+            <a:ext cx="3931920" cy="2743200"/>
           </a:xfrm>
           <a:prstGeom prst="rect">
             <a:avLst/>
           </a:prstGeom>
           <a:solidFill>
-            <a:srgbClr val="1F6F6B"/>
+            <a:srgbClr val="F1ECDD"/>
           </a:solidFill>
           <a:ln>
             <a:noFill/>
@@ -5611,168 +5840,20 @@
       </p:sp>
       <p:sp>
         <p:nvSpPr>
-          <p:cNvPr id="3" name="TextBox 2"/>
-          <p:cNvSpPr txBox="1"/>
-          <p:nvPr/>
-        </p:nvSpPr>
-        <p:spPr>
-          <a:xfrm>
-            <a:off x="868680" y="457200"/>
-            <a:ext cx="10424160" cy="1005840"/>
-          </a:xfrm>
-          <a:prstGeom prst="rect">
-            <a:avLst/>
-          </a:prstGeom>
-          <a:noFill/>
-        </p:spPr>
-        <p:txBody>
-          <a:bodyPr wrap="square" anchor="t" lIns="0" rIns="0" tIns="0" bIns="0">
-            <a:spAutoFit/>
-          </a:bodyPr>
-          <a:lstStyle/>
-          <a:p>
-            <a:pPr algn="l">
-              <a:spcBef>
-                <a:spcPts val="0"/>
-              </a:spcBef>
-              <a:spcAft>
-                <a:spcPts val="1400"/>
-              </a:spcAft>
-            </a:pPr>
-            <a:r>
-              <a:rPr sz="3200" b="1" i="0">
-                <a:solidFill>
-                  <a:srgbClr val="1F6F6B"/>
-                </a:solidFill>
-                <a:latin typeface="Georgia"/>
-              </a:rPr>
-              <a:t>Schritt 6 — Ziele + deine Arbeit aus S1+S2</a:t>
-            </a:r>
-          </a:p>
-        </p:txBody>
-      </p:sp>
-      <p:sp>
-        <p:nvSpPr>
-          <p:cNvPr id="4" name="TextBox 3"/>
-          <p:cNvSpPr txBox="1"/>
-          <p:nvPr/>
-        </p:nvSpPr>
-        <p:spPr>
-          <a:xfrm>
-            <a:off x="868680" y="1783080"/>
-            <a:ext cx="10424160" cy="4572000"/>
-          </a:xfrm>
-          <a:prstGeom prst="rect">
-            <a:avLst/>
-          </a:prstGeom>
-          <a:noFill/>
-        </p:spPr>
-        <p:txBody>
-          <a:bodyPr wrap="square" anchor="t" lIns="0" rIns="0" tIns="0" bIns="0">
-            <a:spAutoFit/>
-          </a:bodyPr>
-          <a:lstStyle/>
-          <a:p>
-            <a:pPr algn="l">
-              <a:spcBef>
-                <a:spcPts val="0"/>
-              </a:spcBef>
-              <a:spcAft>
-                <a:spcPts val="1400"/>
-              </a:spcAft>
-            </a:pPr>
-            <a:r>
-              <a:rPr sz="2200" b="1" i="0">
-                <a:solidFill>
-                  <a:srgbClr val="1F6F6B"/>
-                </a:solidFill>
-                <a:latin typeface="Calibri"/>
-              </a:rPr>
-              <a:t>Trag deine 1-3 Ziele ein und verknüpf sie mit Jahr/Monat/Woche.</a:t>
-            </a:r>
-          </a:p>
-          <a:p>
-            <a:pPr algn="l">
-              <a:spcBef>
-                <a:spcPts val="0"/>
-              </a:spcBef>
-              <a:spcAft>
-                <a:spcPts val="1400"/>
-              </a:spcAft>
-            </a:pPr>
-            <a:r>
-              <a:rPr sz="2100" b="0" i="0">
-                <a:solidFill>
-                  <a:srgbClr val="2A2A2A"/>
-                </a:solidFill>
-                <a:latin typeface="Calibri"/>
-              </a:rPr>
-              <a:t>Leg deine 4 Rollen + dein Hütchen-Inventar als Referenz ab.</a:t>
-            </a:r>
-          </a:p>
-          <a:p>
-            <a:pPr algn="l">
-              <a:spcBef>
-                <a:spcPts val="0"/>
-              </a:spcBef>
-              <a:spcAft>
-                <a:spcPts val="1400"/>
-              </a:spcAft>
-            </a:pPr>
-            <a:r>
-              <a:rPr sz="2000" b="0" i="1">
-                <a:solidFill>
-                  <a:srgbClr val="6E6E6E"/>
-                </a:solidFill>
-                <a:latin typeface="Calibri"/>
-              </a:rPr>
-              <a:t>Stell deinen 90-Tage-Tracker scharf.</a:t>
-            </a:r>
-          </a:p>
-        </p:txBody>
-      </p:sp>
-    </p:spTree>
-  </p:cSld>
-  <p:clrMapOvr>
-    <a:masterClrMapping/>
-  </p:clrMapOvr>
-</p:sld>
-</file>
-
-<file path=ppt/slides/slide9.xml><?xml version="1.0" encoding="utf-8"?>
-<p:sld xmlns:a="http://schemas.openxmlformats.org/drawingml/2006/main" xmlns:p="http://schemas.openxmlformats.org/presentationml/2006/main" xmlns:r="http://schemas.openxmlformats.org/officeDocument/2006/relationships">
-  <p:cSld>
-    <p:bg>
-      <p:bgPr>
-        <a:solidFill>
-          <a:srgbClr val="FFFFFF"/>
-        </a:solidFill>
-        <a:effectLst/>
-      </p:bgPr>
-    </p:bg>
-    <p:spTree>
-      <p:nvGrpSpPr>
-        <p:cNvPr id="1" name=""/>
-        <p:cNvGrpSpPr/>
-        <p:nvPr/>
-      </p:nvGrpSpPr>
-      <p:grpSpPr/>
-      <p:sp>
-        <p:nvSpPr>
-          <p:cNvPr id="2" name="Rectangle 1"/>
+          <p:cNvPr id="9" name="Rectangle 8"/>
           <p:cNvSpPr/>
           <p:nvPr/>
         </p:nvSpPr>
         <p:spPr>
           <a:xfrm>
-            <a:off x="548640" y="502920"/>
-            <a:ext cx="201168" cy="201168"/>
+            <a:off x="4663440" y="1737360"/>
+            <a:ext cx="3931920" cy="91440"/>
           </a:xfrm>
           <a:prstGeom prst="rect">
             <a:avLst/>
           </a:prstGeom>
           <a:solidFill>
-            <a:srgbClr val="1F6F6B"/>
+            <a:srgbClr val="DC822E"/>
           </a:solidFill>
           <a:ln>
             <a:noFill/>
@@ -5803,14 +5884,14 @@
       </p:sp>
       <p:sp>
         <p:nvSpPr>
-          <p:cNvPr id="3" name="TextBox 2"/>
+          <p:cNvPr id="10" name="TextBox 9"/>
           <p:cNvSpPr txBox="1"/>
           <p:nvPr/>
         </p:nvSpPr>
         <p:spPr>
           <a:xfrm>
-            <a:off x="868680" y="457200"/>
-            <a:ext cx="10424160" cy="1005840"/>
+            <a:off x="4846320" y="1920240"/>
+            <a:ext cx="3657600" cy="274320"/>
           </a:xfrm>
           <a:prstGeom prst="rect">
             <a:avLst/>
@@ -5823,36 +5904,28 @@
           </a:bodyPr>
           <a:lstStyle/>
           <a:p>
-            <a:pPr algn="l">
-              <a:spcBef>
-                <a:spcPts val="0"/>
-              </a:spcBef>
-              <a:spcAft>
-                <a:spcPts val="1400"/>
-              </a:spcAft>
-            </a:pPr>
-            <a:r>
-              <a:rPr sz="3200" b="1" i="0">
-                <a:solidFill>
-                  <a:srgbClr val="1F6F6B"/>
-                </a:solidFill>
-                <a:latin typeface="Georgia"/>
+            <a:r>
+              <a:rPr sz="1000" b="1" i="0">
+                <a:solidFill>
+                  <a:srgbClr val="DC822E"/>
+                </a:solidFill>
+                <a:latin typeface="Calibri"/>
               </a:rPr>
-              <a:t>Genau das liest dein Cockpit-Bot</a:t>
-            </a:r>
-          </a:p>
-        </p:txBody>
-      </p:sp>
-      <p:sp>
-        <p:nvSpPr>
-          <p:cNvPr id="4" name="TextBox 3"/>
+              <a:t>▶  ALS NÄCHSTES</a:t>
+            </a:r>
+          </a:p>
+        </p:txBody>
+      </p:sp>
+      <p:sp>
+        <p:nvSpPr>
+          <p:cNvPr id="11" name="TextBox 10"/>
           <p:cNvSpPr txBox="1"/>
           <p:nvPr/>
         </p:nvSpPr>
         <p:spPr>
           <a:xfrm>
-            <a:off x="868680" y="1783080"/>
-            <a:ext cx="10424160" cy="4572000"/>
+            <a:off x="4846320" y="2286000"/>
+            <a:ext cx="3657600" cy="548640"/>
           </a:xfrm>
           <a:prstGeom prst="rect">
             <a:avLst/>
@@ -5865,60 +5938,117 @@
           </a:bodyPr>
           <a:lstStyle/>
           <a:p>
-            <a:pPr algn="l">
-              <a:spcBef>
-                <a:spcPts val="0"/>
-              </a:spcBef>
-              <a:spcAft>
-                <a:spcPts val="1400"/>
-              </a:spcAft>
-            </a:pPr>
-            <a:r>
-              <a:rPr sz="2100" b="0" i="0">
-                <a:solidFill>
-                  <a:srgbClr val="2A2A2A"/>
+            <a:r>
+              <a:rPr sz="1600" b="1" i="0">
+                <a:solidFill>
+                  <a:srgbClr val="1A3A4A"/>
+                </a:solidFill>
+                <a:latin typeface="Georgia"/>
+              </a:rPr>
+              <a:t>Live-Call 2</a:t>
+            </a:r>
+          </a:p>
+        </p:txBody>
+      </p:sp>
+      <p:sp>
+        <p:nvSpPr>
+          <p:cNvPr id="12" name="TextBox 11"/>
+          <p:cNvSpPr txBox="1"/>
+          <p:nvPr/>
+        </p:nvSpPr>
+        <p:spPr>
+          <a:xfrm>
+            <a:off x="4846320" y="2880360"/>
+            <a:ext cx="3566160" cy="1463040"/>
+          </a:xfrm>
+          <a:prstGeom prst="rect">
+            <a:avLst/>
+          </a:prstGeom>
+          <a:noFill/>
+        </p:spPr>
+        <p:txBody>
+          <a:bodyPr wrap="square" anchor="t" lIns="0" rIns="0" tIns="0" bIns="0">
+            <a:spAutoFit/>
+          </a:bodyPr>
+          <a:lstStyle/>
+          <a:p>
+            <a:r>
+              <a:rPr sz="1250" b="0" i="0">
+                <a:solidFill>
+                  <a:srgbClr val="2C3E50"/>
                 </a:solidFill>
                 <a:latin typeface="Calibri"/>
               </a:rPr>
-              <a:t>Weil alles verknüpft in Notion steht …</a:t>
-            </a:r>
-          </a:p>
-          <a:p>
-            <a:pPr algn="l">
-              <a:spcBef>
-                <a:spcPts val="0"/>
-              </a:spcBef>
-              <a:spcAft>
-                <a:spcPts val="1400"/>
-              </a:spcAft>
-            </a:pPr>
-            <a:r>
-              <a:rPr sz="2600" b="1" i="0">
-                <a:solidFill>
-                  <a:srgbClr val="2A2A2A"/>
-                </a:solidFill>
-                <a:latin typeface="Georgia"/>
-              </a:rPr>
-              <a:t>… kann dich dein Cockpit-Bot morgens per Telegram briefen.</a:t>
-            </a:r>
-          </a:p>
-          <a:p>
-            <a:pPr algn="l">
-              <a:spcBef>
-                <a:spcPts val="0"/>
-              </a:spcBef>
-              <a:spcAft>
-                <a:spcPts val="1400"/>
-              </a:spcAft>
-            </a:pPr>
-            <a:r>
-              <a:rPr sz="2000" b="0" i="1">
-                <a:solidFill>
-                  <a:srgbClr val="6E6E6E"/>
+              <a:t>Notion-Brain-Sprechstunde — bring dein eingerichtetes Notion mit.</a:t>
+            </a:r>
+          </a:p>
+        </p:txBody>
+      </p:sp>
+      <p:sp>
+        <p:nvSpPr>
+          <p:cNvPr id="13" name="TextBox 12"/>
+          <p:cNvSpPr txBox="1"/>
+          <p:nvPr/>
+        </p:nvSpPr>
+        <p:spPr>
+          <a:xfrm>
+            <a:off x="457200" y="4754880"/>
+            <a:ext cx="5486400" cy="274320"/>
+          </a:xfrm>
+          <a:prstGeom prst="rect">
+            <a:avLst/>
+          </a:prstGeom>
+          <a:noFill/>
+        </p:spPr>
+        <p:txBody>
+          <a:bodyPr wrap="square" anchor="t" lIns="0" rIns="0" tIns="0" bIns="0">
+            <a:spAutoFit/>
+          </a:bodyPr>
+          <a:lstStyle/>
+          <a:p>
+            <a:r>
+              <a:rPr sz="900" b="0" i="0">
+                <a:solidFill>
+                  <a:srgbClr val="7A8A95"/>
                 </a:solidFill>
                 <a:latin typeface="Calibri"/>
               </a:rPr>
-              <a:t>Den Bot baust du in Säule 4 — das Fundament dafür legst du heute.</a:t>
+              <a:t>Mama-CEO · Säule 3 · Lektion 3.5</a:t>
+            </a:r>
+          </a:p>
+        </p:txBody>
+      </p:sp>
+      <p:sp>
+        <p:nvSpPr>
+          <p:cNvPr id="14" name="TextBox 13"/>
+          <p:cNvSpPr txBox="1"/>
+          <p:nvPr/>
+        </p:nvSpPr>
+        <p:spPr>
+          <a:xfrm>
+            <a:off x="6400800" y="4754880"/>
+            <a:ext cx="2286000" cy="274320"/>
+          </a:xfrm>
+          <a:prstGeom prst="rect">
+            <a:avLst/>
+          </a:prstGeom>
+          <a:noFill/>
+        </p:spPr>
+        <p:txBody>
+          <a:bodyPr wrap="square" anchor="t" lIns="0" rIns="0" tIns="0" bIns="0">
+            <a:spAutoFit/>
+          </a:bodyPr>
+          <a:lstStyle/>
+          <a:p>
+            <a:pPr algn="r"/>
+            <a:r>
+              <a:rPr sz="900" b="0" i="0">
+                <a:solidFill>
+                  <a:srgbClr val="7A8A95"/>
+                </a:solidFill>
+                <a:latin typeface="Calibri"/>
+              </a:rPr>
+              <a:t>Mum Life Balance</a:t>
             </a:r>
           </a:p>
         </p:txBody>
